--- a/output_pptx/What_A_Friend_We_Have_In_Jesus.pptx
+++ b/output_pptx/What_A_Friend_We_Have_In_Jesus.pptx
@@ -3122,23 +3122,23 @@
         </p:nvSpPr>
         <p:spPr>
           <a:xfrm>
-            <a:off x="594360" y="2258568"/>
-            <a:ext cx="11002975" cy="685800"/>
-          </a:xfrm>
-          <a:prstGeom prst="rect">
-            <a:avLst/>
-          </a:prstGeom>
-          <a:noFill/>
-        </p:spPr>
-        <p:txBody>
-          <a:bodyPr wrap="square">
-            <a:spAutoFit/>
-          </a:bodyPr>
-          <a:lstStyle/>
-          <a:p>
-            <a:pPr algn="ctr"/>
-            <a:r>
-              <a:rPr sz="4400" b="1" i="0">
+            <a:off x="640080" y="2052828"/>
+            <a:ext cx="10911535" cy="731520"/>
+          </a:xfrm>
+          <a:prstGeom prst="rect">
+            <a:avLst/>
+          </a:prstGeom>
+          <a:noFill/>
+        </p:spPr>
+        <p:txBody>
+          <a:bodyPr wrap="square">
+            <a:spAutoFit/>
+          </a:bodyPr>
+          <a:lstStyle/>
+          <a:p>
+            <a:pPr algn="ctr"/>
+            <a:r>
+              <a:rPr sz="4800" b="1" i="0">
                 <a:solidFill>
                   <a:srgbClr val="FFFFFF"/>
                 </a:solidFill>
@@ -3157,25 +3157,60 @@
         </p:nvSpPr>
         <p:spPr>
           <a:xfrm>
-            <a:off x="594360" y="2980944"/>
-            <a:ext cx="11002975" cy="347472"/>
-          </a:xfrm>
-          <a:prstGeom prst="rect">
-            <a:avLst/>
-          </a:prstGeom>
-          <a:noFill/>
-        </p:spPr>
-        <p:txBody>
-          <a:bodyPr wrap="square">
-            <a:spAutoFit/>
-          </a:bodyPr>
-          <a:lstStyle/>
-          <a:p>
-            <a:pPr algn="ctr"/>
-            <a:r>
-              <a:rPr sz="2200" b="0" i="1">
-                <a:solidFill>
-                  <a:srgbClr val="8C8C8C"/>
+            <a:off x="640080" y="2985516"/>
+            <a:ext cx="10911535" cy="731520"/>
+          </a:xfrm>
+          <a:prstGeom prst="rect">
+            <a:avLst/>
+          </a:prstGeom>
+          <a:noFill/>
+        </p:spPr>
+        <p:txBody>
+          <a:bodyPr wrap="square">
+            <a:spAutoFit/>
+          </a:bodyPr>
+          <a:lstStyle/>
+          <a:p>
+            <a:pPr algn="ctr"/>
+            <a:r>
+              <a:rPr sz="4800" b="1" i="0">
+                <a:solidFill>
+                  <a:srgbClr val="FFFFFF"/>
+                </a:solidFill>
+                <a:latin typeface="Arial"/>
+              </a:rPr>
+              <a:t>Carregou co'a nossa dor,</a:t>
+            </a:r>
+          </a:p>
+        </p:txBody>
+      </p:sp>
+      <p:sp>
+        <p:nvSpPr>
+          <p:cNvPr id="4" name="TextBox 3"/>
+          <p:cNvSpPr txBox="1"/>
+          <p:nvPr/>
+        </p:nvSpPr>
+        <p:spPr>
+          <a:xfrm>
+            <a:off x="640080" y="4128516"/>
+            <a:ext cx="10911535" cy="310896"/>
+          </a:xfrm>
+          <a:prstGeom prst="rect">
+            <a:avLst/>
+          </a:prstGeom>
+          <a:noFill/>
+        </p:spPr>
+        <p:txBody>
+          <a:bodyPr wrap="square">
+            <a:spAutoFit/>
+          </a:bodyPr>
+          <a:lstStyle/>
+          <a:p>
+            <a:pPr algn="ctr"/>
+            <a:r>
+              <a:rPr sz="2000" b="0" i="0">
+                <a:solidFill>
+                  <a:srgbClr val="828282"/>
                 </a:solidFill>
                 <a:latin typeface="Arial"/>
               </a:rPr>
@@ -3186,66 +3221,31 @@
       </p:sp>
       <p:sp>
         <p:nvSpPr>
-          <p:cNvPr id="4" name="TextBox 3"/>
-          <p:cNvSpPr txBox="1"/>
-          <p:nvPr/>
-        </p:nvSpPr>
-        <p:spPr>
-          <a:xfrm>
-            <a:off x="594360" y="3529584"/>
-            <a:ext cx="11002975" cy="685800"/>
-          </a:xfrm>
-          <a:prstGeom prst="rect">
-            <a:avLst/>
-          </a:prstGeom>
-          <a:noFill/>
-        </p:spPr>
-        <p:txBody>
-          <a:bodyPr wrap="square">
-            <a:spAutoFit/>
-          </a:bodyPr>
-          <a:lstStyle/>
-          <a:p>
-            <a:pPr algn="ctr"/>
-            <a:r>
-              <a:rPr sz="4400" b="1" i="0">
-                <a:solidFill>
-                  <a:srgbClr val="FFFFFF"/>
-                </a:solidFill>
-                <a:latin typeface="Arial"/>
-              </a:rPr>
-              <a:t>Carregou co'a nossa dor,</a:t>
-            </a:r>
-          </a:p>
-        </p:txBody>
-      </p:sp>
-      <p:sp>
-        <p:nvSpPr>
           <p:cNvPr id="5" name="TextBox 4"/>
           <p:cNvSpPr txBox="1"/>
           <p:nvPr/>
         </p:nvSpPr>
         <p:spPr>
           <a:xfrm>
-            <a:off x="594360" y="4251960"/>
-            <a:ext cx="11002975" cy="347472"/>
-          </a:xfrm>
-          <a:prstGeom prst="rect">
-            <a:avLst/>
-          </a:prstGeom>
-          <a:noFill/>
-        </p:spPr>
-        <p:txBody>
-          <a:bodyPr wrap="square">
-            <a:spAutoFit/>
-          </a:bodyPr>
-          <a:lstStyle/>
-          <a:p>
-            <a:pPr algn="ctr"/>
-            <a:r>
-              <a:rPr sz="2200" b="0" i="1">
-                <a:solidFill>
-                  <a:srgbClr val="8C8C8C"/>
+            <a:off x="640080" y="4494276"/>
+            <a:ext cx="10911535" cy="310896"/>
+          </a:xfrm>
+          <a:prstGeom prst="rect">
+            <a:avLst/>
+          </a:prstGeom>
+          <a:noFill/>
+        </p:spPr>
+        <p:txBody>
+          <a:bodyPr wrap="square">
+            <a:spAutoFit/>
+          </a:bodyPr>
+          <a:lstStyle/>
+          <a:p>
+            <a:pPr algn="ctr"/>
+            <a:r>
+              <a:rPr sz="2000" b="0" i="0">
+                <a:solidFill>
+                  <a:srgbClr val="828282"/>
                 </a:solidFill>
                 <a:latin typeface="Arial"/>
               </a:rPr>
@@ -3288,23 +3288,23 @@
         </p:nvSpPr>
         <p:spPr>
           <a:xfrm>
-            <a:off x="594360" y="2258568"/>
-            <a:ext cx="11002975" cy="685800"/>
-          </a:xfrm>
-          <a:prstGeom prst="rect">
-            <a:avLst/>
-          </a:prstGeom>
-          <a:noFill/>
-        </p:spPr>
-        <p:txBody>
-          <a:bodyPr wrap="square">
-            <a:spAutoFit/>
-          </a:bodyPr>
-          <a:lstStyle/>
-          <a:p>
-            <a:pPr algn="ctr"/>
-            <a:r>
-              <a:rPr sz="4400" b="1" i="0">
+            <a:off x="640080" y="2052828"/>
+            <a:ext cx="10911535" cy="731520"/>
+          </a:xfrm>
+          <a:prstGeom prst="rect">
+            <a:avLst/>
+          </a:prstGeom>
+          <a:noFill/>
+        </p:spPr>
+        <p:txBody>
+          <a:bodyPr wrap="square">
+            <a:spAutoFit/>
+          </a:bodyPr>
+          <a:lstStyle/>
+          <a:p>
+            <a:pPr algn="ctr"/>
+            <a:r>
+              <a:rPr sz="4800" b="1" i="0">
                 <a:solidFill>
                   <a:srgbClr val="FFFFFF"/>
                 </a:solidFill>
@@ -3323,99 +3323,29 @@
         </p:nvSpPr>
         <p:spPr>
           <a:xfrm>
-            <a:off x="594360" y="2980944"/>
-            <a:ext cx="11002975" cy="347472"/>
-          </a:xfrm>
-          <a:prstGeom prst="rect">
-            <a:avLst/>
-          </a:prstGeom>
-          <a:noFill/>
-        </p:spPr>
-        <p:txBody>
-          <a:bodyPr wrap="square">
-            <a:spAutoFit/>
-          </a:bodyPr>
-          <a:lstStyle/>
-          <a:p>
-            <a:pPr algn="ctr"/>
-            <a:r>
-              <a:rPr sz="2200" b="0" i="1">
-                <a:solidFill>
-                  <a:srgbClr val="8C8C8C"/>
-                </a:solidFill>
-                <a:latin typeface="Arial"/>
-              </a:rPr>
-              <a:t/>
-            </a:r>
-          </a:p>
-        </p:txBody>
-      </p:sp>
-      <p:sp>
-        <p:nvSpPr>
-          <p:cNvPr id="4" name="TextBox 3"/>
-          <p:cNvSpPr txBox="1"/>
-          <p:nvPr/>
-        </p:nvSpPr>
-        <p:spPr>
-          <a:xfrm>
-            <a:off x="594360" y="3529584"/>
-            <a:ext cx="11002975" cy="685800"/>
-          </a:xfrm>
-          <a:prstGeom prst="rect">
-            <a:avLst/>
-          </a:prstGeom>
-          <a:noFill/>
-        </p:spPr>
-        <p:txBody>
-          <a:bodyPr wrap="square">
-            <a:spAutoFit/>
-          </a:bodyPr>
-          <a:lstStyle/>
-          <a:p>
-            <a:pPr algn="ctr"/>
-            <a:r>
-              <a:rPr sz="4400" b="1" i="0">
+            <a:off x="640080" y="2985516"/>
+            <a:ext cx="10911535" cy="731520"/>
+          </a:xfrm>
+          <a:prstGeom prst="rect">
+            <a:avLst/>
+          </a:prstGeom>
+          <a:noFill/>
+        </p:spPr>
+        <p:txBody>
+          <a:bodyPr wrap="square">
+            <a:spAutoFit/>
+          </a:bodyPr>
+          <a:lstStyle/>
+          <a:p>
+            <a:pPr algn="ctr"/>
+            <a:r>
+              <a:rPr sz="4800" b="1" i="0">
                 <a:solidFill>
                   <a:srgbClr val="FFFFFF"/>
                 </a:solidFill>
                 <a:latin typeface="Arial"/>
               </a:rPr>
               <a:t>Paz terás no coração.</a:t>
-            </a:r>
-          </a:p>
-        </p:txBody>
-      </p:sp>
-      <p:sp>
-        <p:nvSpPr>
-          <p:cNvPr id="5" name="TextBox 4"/>
-          <p:cNvSpPr txBox="1"/>
-          <p:nvPr/>
-        </p:nvSpPr>
-        <p:spPr>
-          <a:xfrm>
-            <a:off x="594360" y="4251960"/>
-            <a:ext cx="11002975" cy="347472"/>
-          </a:xfrm>
-          <a:prstGeom prst="rect">
-            <a:avLst/>
-          </a:prstGeom>
-          <a:noFill/>
-        </p:spPr>
-        <p:txBody>
-          <a:bodyPr wrap="square">
-            <a:spAutoFit/>
-          </a:bodyPr>
-          <a:lstStyle/>
-          <a:p>
-            <a:pPr algn="ctr"/>
-            <a:r>
-              <a:rPr sz="2200" b="0" i="1">
-                <a:solidFill>
-                  <a:srgbClr val="8C8C8C"/>
-                </a:solidFill>
-                <a:latin typeface="Arial"/>
-              </a:rPr>
-              <a:t/>
             </a:r>
           </a:p>
         </p:txBody>
@@ -3454,23 +3384,23 @@
         </p:nvSpPr>
         <p:spPr>
           <a:xfrm>
-            <a:off x="594360" y="1837944"/>
-            <a:ext cx="11002975" cy="685800"/>
-          </a:xfrm>
-          <a:prstGeom prst="rect">
-            <a:avLst/>
-          </a:prstGeom>
-          <a:noFill/>
-        </p:spPr>
-        <p:txBody>
-          <a:bodyPr wrap="square">
-            <a:spAutoFit/>
-          </a:bodyPr>
-          <a:lstStyle/>
-          <a:p>
-            <a:pPr algn="ctr"/>
-            <a:r>
-              <a:rPr sz="4400" b="1" i="0">
+            <a:off x="640080" y="1650492"/>
+            <a:ext cx="10911535" cy="731520"/>
+          </a:xfrm>
+          <a:prstGeom prst="rect">
+            <a:avLst/>
+          </a:prstGeom>
+          <a:noFill/>
+        </p:spPr>
+        <p:txBody>
+          <a:bodyPr wrap="square">
+            <a:spAutoFit/>
+          </a:bodyPr>
+          <a:lstStyle/>
+          <a:p>
+            <a:pPr algn="ctr"/>
+            <a:r>
+              <a:rPr sz="4800" b="1" i="0">
                 <a:solidFill>
                   <a:srgbClr val="FFFFFF"/>
                 </a:solidFill>
@@ -3489,8 +3419,8 @@
         </p:nvSpPr>
         <p:spPr>
           <a:xfrm>
-            <a:off x="594360" y="2560320"/>
-            <a:ext cx="11002975" cy="384048"/>
+            <a:off x="640080" y="2418588"/>
+            <a:ext cx="10911535" cy="365760"/>
           </a:xfrm>
           <a:prstGeom prst="rect">
             <a:avLst/>
@@ -3507,7 +3437,7 @@
             <a:r>
               <a:rPr sz="2400" b="0" i="1">
                 <a:solidFill>
-                  <a:srgbClr val="B4B4B4"/>
+                  <a:srgbClr val="AAAAAA"/>
                 </a:solidFill>
                 <a:latin typeface="Arial"/>
               </a:rPr>
@@ -3524,8 +3454,78 @@
         </p:nvSpPr>
         <p:spPr>
           <a:xfrm>
-            <a:off x="594360" y="2980944"/>
-            <a:ext cx="11002975" cy="347472"/>
+            <a:off x="640080" y="2985516"/>
+            <a:ext cx="10911535" cy="731520"/>
+          </a:xfrm>
+          <a:prstGeom prst="rect">
+            <a:avLst/>
+          </a:prstGeom>
+          <a:noFill/>
+        </p:spPr>
+        <p:txBody>
+          <a:bodyPr wrap="square">
+            <a:spAutoFit/>
+          </a:bodyPr>
+          <a:lstStyle/>
+          <a:p>
+            <a:pPr algn="ctr"/>
+            <a:r>
+              <a:rPr sz="4800" b="1" i="0">
+                <a:solidFill>
+                  <a:srgbClr val="FFFFFF"/>
+                </a:solidFill>
+                <a:latin typeface="Arial"/>
+              </a:rPr>
+              <a:t>われらの弱きを  　知りて憐れむ</a:t>
+            </a:r>
+          </a:p>
+        </p:txBody>
+      </p:sp>
+      <p:sp>
+        <p:nvSpPr>
+          <p:cNvPr id="5" name="TextBox 4"/>
+          <p:cNvSpPr txBox="1"/>
+          <p:nvPr/>
+        </p:nvSpPr>
+        <p:spPr>
+          <a:xfrm>
+            <a:off x="640080" y="3753612"/>
+            <a:ext cx="10911535" cy="365760"/>
+          </a:xfrm>
+          <a:prstGeom prst="rect">
+            <a:avLst/>
+          </a:prstGeom>
+          <a:noFill/>
+        </p:spPr>
+        <p:txBody>
+          <a:bodyPr wrap="square">
+            <a:spAutoFit/>
+          </a:bodyPr>
+          <a:lstStyle/>
+          <a:p>
+            <a:pPr algn="ctr"/>
+            <a:r>
+              <a:rPr sz="2400" b="0" i="1">
+                <a:solidFill>
+                  <a:srgbClr val="AAAAAA"/>
+                </a:solidFill>
+                <a:latin typeface="Arial"/>
+              </a:rPr>
+              <a:t>wa-rera no Yowaki wo    shi-ri te awaremu</a:t>
+            </a:r>
+          </a:p>
+        </p:txBody>
+      </p:sp>
+      <p:sp>
+        <p:nvSpPr>
+          <p:cNvPr id="6" name="TextBox 5"/>
+          <p:cNvSpPr txBox="1"/>
+          <p:nvPr/>
+        </p:nvSpPr>
+        <p:spPr>
+          <a:xfrm>
+            <a:off x="640080" y="4530852"/>
+            <a:ext cx="10911535" cy="310896"/>
           </a:xfrm>
           <a:prstGeom prst="rect">
             <a:avLst/>
@@ -3542,81 +3542,11 @@
             <a:r>
               <a:rPr sz="2000" b="0" i="1">
                 <a:solidFill>
-                  <a:srgbClr val="8C8C8C"/>
-                </a:solidFill>
-                <a:latin typeface="Arial"/>
-              </a:rPr>
-              <a:t/>
-            </a:r>
-          </a:p>
-        </p:txBody>
-      </p:sp>
-      <p:sp>
-        <p:nvSpPr>
-          <p:cNvPr id="5" name="TextBox 4"/>
-          <p:cNvSpPr txBox="1"/>
-          <p:nvPr/>
-        </p:nvSpPr>
-        <p:spPr>
-          <a:xfrm>
-            <a:off x="594360" y="3529584"/>
-            <a:ext cx="11002975" cy="685800"/>
-          </a:xfrm>
-          <a:prstGeom prst="rect">
-            <a:avLst/>
-          </a:prstGeom>
-          <a:noFill/>
-        </p:spPr>
-        <p:txBody>
-          <a:bodyPr wrap="square">
-            <a:spAutoFit/>
-          </a:bodyPr>
-          <a:lstStyle/>
-          <a:p>
-            <a:pPr algn="ctr"/>
-            <a:r>
-              <a:rPr sz="4400" b="1" i="0">
-                <a:solidFill>
-                  <a:srgbClr val="FFFFFF"/>
-                </a:solidFill>
-                <a:latin typeface="Arial"/>
-              </a:rPr>
-              <a:t>われらの弱きを  　知りて憐れむ</a:t>
-            </a:r>
-          </a:p>
-        </p:txBody>
-      </p:sp>
-      <p:sp>
-        <p:nvSpPr>
-          <p:cNvPr id="6" name="TextBox 5"/>
-          <p:cNvSpPr txBox="1"/>
-          <p:nvPr/>
-        </p:nvSpPr>
-        <p:spPr>
-          <a:xfrm>
-            <a:off x="594360" y="4251960"/>
-            <a:ext cx="11002975" cy="384048"/>
-          </a:xfrm>
-          <a:prstGeom prst="rect">
-            <a:avLst/>
-          </a:prstGeom>
-          <a:noFill/>
-        </p:spPr>
-        <p:txBody>
-          <a:bodyPr wrap="square">
-            <a:spAutoFit/>
-          </a:bodyPr>
-          <a:lstStyle/>
-          <a:p>
-            <a:pPr algn="ctr"/>
-            <a:r>
-              <a:rPr sz="2400" b="0" i="1">
-                <a:solidFill>
-                  <a:srgbClr val="B4B4B4"/>
-                </a:solidFill>
-                <a:latin typeface="Arial"/>
-              </a:rPr>
-              <a:t>wa-rera no Yowaki wo    shi-ri te awaremu</a:t>
+                  <a:srgbClr val="828282"/>
+                </a:solidFill>
+                <a:latin typeface="Arial"/>
+              </a:rPr>
+              <a:t>Tu estás fraco e carregado</a:t>
             </a:r>
           </a:p>
         </p:txBody>
@@ -3629,8 +3559,8 @@
         </p:nvSpPr>
         <p:spPr>
           <a:xfrm>
-            <a:off x="594360" y="4672584"/>
-            <a:ext cx="11002975" cy="347472"/>
+            <a:off x="640080" y="4896612"/>
+            <a:ext cx="10911535" cy="310896"/>
           </a:xfrm>
           <a:prstGeom prst="rect">
             <a:avLst/>
@@ -3647,11 +3577,11 @@
             <a:r>
               <a:rPr sz="2000" b="0" i="1">
                 <a:solidFill>
-                  <a:srgbClr val="8C8C8C"/>
-                </a:solidFill>
-                <a:latin typeface="Arial"/>
-              </a:rPr>
-              <a:t/>
+                  <a:srgbClr val="828282"/>
+                </a:solidFill>
+                <a:latin typeface="Arial"/>
+              </a:rPr>
+              <a:t>De cuidados e temor?</a:t>
             </a:r>
           </a:p>
         </p:txBody>
@@ -3690,23 +3620,23 @@
         </p:nvSpPr>
         <p:spPr>
           <a:xfrm>
-            <a:off x="594360" y="1837944"/>
-            <a:ext cx="11002975" cy="685800"/>
-          </a:xfrm>
-          <a:prstGeom prst="rect">
-            <a:avLst/>
-          </a:prstGeom>
-          <a:noFill/>
-        </p:spPr>
-        <p:txBody>
-          <a:bodyPr wrap="square">
-            <a:spAutoFit/>
-          </a:bodyPr>
-          <a:lstStyle/>
-          <a:p>
-            <a:pPr algn="ctr"/>
-            <a:r>
-              <a:rPr sz="4400" b="1" i="0">
+            <a:off x="640080" y="1650492"/>
+            <a:ext cx="10911535" cy="731520"/>
+          </a:xfrm>
+          <a:prstGeom prst="rect">
+            <a:avLst/>
+          </a:prstGeom>
+          <a:noFill/>
+        </p:spPr>
+        <p:txBody>
+          <a:bodyPr wrap="square">
+            <a:spAutoFit/>
+          </a:bodyPr>
+          <a:lstStyle/>
+          <a:p>
+            <a:pPr algn="ctr"/>
+            <a:r>
+              <a:rPr sz="4800" b="1" i="0">
                 <a:solidFill>
                   <a:srgbClr val="FFFFFF"/>
                 </a:solidFill>
@@ -3725,8 +3655,8 @@
         </p:nvSpPr>
         <p:spPr>
           <a:xfrm>
-            <a:off x="594360" y="2560320"/>
-            <a:ext cx="11002975" cy="384048"/>
+            <a:off x="640080" y="2418588"/>
+            <a:ext cx="10911535" cy="365760"/>
           </a:xfrm>
           <a:prstGeom prst="rect">
             <a:avLst/>
@@ -3743,7 +3673,7 @@
             <a:r>
               <a:rPr sz="2400" b="0" i="1">
                 <a:solidFill>
-                  <a:srgbClr val="B4B4B4"/>
+                  <a:srgbClr val="AAAAAA"/>
                 </a:solidFill>
                 <a:latin typeface="Arial"/>
               </a:rPr>
@@ -3760,8 +3690,78 @@
         </p:nvSpPr>
         <p:spPr>
           <a:xfrm>
-            <a:off x="594360" y="2980944"/>
-            <a:ext cx="11002975" cy="347472"/>
+            <a:off x="640080" y="2985516"/>
+            <a:ext cx="10911535" cy="731520"/>
+          </a:xfrm>
+          <a:prstGeom prst="rect">
+            <a:avLst/>
+          </a:prstGeom>
+          <a:noFill/>
+        </p:spPr>
+        <p:txBody>
+          <a:bodyPr wrap="square">
+            <a:spAutoFit/>
+          </a:bodyPr>
+          <a:lstStyle/>
+          <a:p>
+            <a:pPr algn="ctr"/>
+            <a:r>
+              <a:rPr sz="4800" b="1" i="0">
+                <a:solidFill>
+                  <a:srgbClr val="FFFFFF"/>
+                </a:solidFill>
+                <a:latin typeface="Arial"/>
+              </a:rPr>
+              <a:t>祈りにこたえて なぐさめたまわん</a:t>
+            </a:r>
+          </a:p>
+        </p:txBody>
+      </p:sp>
+      <p:sp>
+        <p:nvSpPr>
+          <p:cNvPr id="5" name="TextBox 4"/>
+          <p:cNvSpPr txBox="1"/>
+          <p:nvPr/>
+        </p:nvSpPr>
+        <p:spPr>
+          <a:xfrm>
+            <a:off x="640080" y="3753612"/>
+            <a:ext cx="10911535" cy="365760"/>
+          </a:xfrm>
+          <a:prstGeom prst="rect">
+            <a:avLst/>
+          </a:prstGeom>
+          <a:noFill/>
+        </p:spPr>
+        <p:txBody>
+          <a:bodyPr wrap="square">
+            <a:spAutoFit/>
+          </a:bodyPr>
+          <a:lstStyle/>
+          <a:p>
+            <a:pPr algn="ctr"/>
+            <a:r>
+              <a:rPr sz="2400" b="0" i="1">
+                <a:solidFill>
+                  <a:srgbClr val="AAAAAA"/>
+                </a:solidFill>
+                <a:latin typeface="Arial"/>
+              </a:rPr>
+              <a:t>I-nori ni kotaete   na-gusameta mawan</a:t>
+            </a:r>
+          </a:p>
+        </p:txBody>
+      </p:sp>
+      <p:sp>
+        <p:nvSpPr>
+          <p:cNvPr id="6" name="TextBox 5"/>
+          <p:cNvSpPr txBox="1"/>
+          <p:nvPr/>
+        </p:nvSpPr>
+        <p:spPr>
+          <a:xfrm>
+            <a:off x="640080" y="4530852"/>
+            <a:ext cx="10911535" cy="310896"/>
           </a:xfrm>
           <a:prstGeom prst="rect">
             <a:avLst/>
@@ -3778,81 +3778,11 @@
             <a:r>
               <a:rPr sz="2000" b="0" i="1">
                 <a:solidFill>
-                  <a:srgbClr val="8C8C8C"/>
-                </a:solidFill>
-                <a:latin typeface="Arial"/>
-              </a:rPr>
-              <a:t/>
-            </a:r>
-          </a:p>
-        </p:txBody>
-      </p:sp>
-      <p:sp>
-        <p:nvSpPr>
-          <p:cNvPr id="5" name="TextBox 4"/>
-          <p:cNvSpPr txBox="1"/>
-          <p:nvPr/>
-        </p:nvSpPr>
-        <p:spPr>
-          <a:xfrm>
-            <a:off x="594360" y="3529584"/>
-            <a:ext cx="11002975" cy="685800"/>
-          </a:xfrm>
-          <a:prstGeom prst="rect">
-            <a:avLst/>
-          </a:prstGeom>
-          <a:noFill/>
-        </p:spPr>
-        <p:txBody>
-          <a:bodyPr wrap="square">
-            <a:spAutoFit/>
-          </a:bodyPr>
-          <a:lstStyle/>
-          <a:p>
-            <a:pPr algn="ctr"/>
-            <a:r>
-              <a:rPr sz="4400" b="1" i="0">
-                <a:solidFill>
-                  <a:srgbClr val="FFFFFF"/>
-                </a:solidFill>
-                <a:latin typeface="Arial"/>
-              </a:rPr>
-              <a:t>祈りにこたえて なぐさめたまわん</a:t>
-            </a:r>
-          </a:p>
-        </p:txBody>
-      </p:sp>
-      <p:sp>
-        <p:nvSpPr>
-          <p:cNvPr id="6" name="TextBox 5"/>
-          <p:cNvSpPr txBox="1"/>
-          <p:nvPr/>
-        </p:nvSpPr>
-        <p:spPr>
-          <a:xfrm>
-            <a:off x="594360" y="4251960"/>
-            <a:ext cx="11002975" cy="384048"/>
-          </a:xfrm>
-          <a:prstGeom prst="rect">
-            <a:avLst/>
-          </a:prstGeom>
-          <a:noFill/>
-        </p:spPr>
-        <p:txBody>
-          <a:bodyPr wrap="square">
-            <a:spAutoFit/>
-          </a:bodyPr>
-          <a:lstStyle/>
-          <a:p>
-            <a:pPr algn="ctr"/>
-            <a:r>
-              <a:rPr sz="2400" b="0" i="1">
-                <a:solidFill>
-                  <a:srgbClr val="B4B4B4"/>
-                </a:solidFill>
-                <a:latin typeface="Arial"/>
-              </a:rPr>
-              <a:t>I-nori ni kotaete   na-gusameta mawan</a:t>
+                  <a:srgbClr val="828282"/>
+                </a:solidFill>
+                <a:latin typeface="Arial"/>
+              </a:rPr>
+              <a:t>A Jesus, refúgio eterno,</a:t>
             </a:r>
           </a:p>
         </p:txBody>
@@ -3865,8 +3795,8 @@
         </p:nvSpPr>
         <p:spPr>
           <a:xfrm>
-            <a:off x="594360" y="4672584"/>
-            <a:ext cx="11002975" cy="347472"/>
+            <a:off x="640080" y="4896612"/>
+            <a:ext cx="10911535" cy="310896"/>
           </a:xfrm>
           <a:prstGeom prst="rect">
             <a:avLst/>
@@ -3883,11 +3813,11 @@
             <a:r>
               <a:rPr sz="2000" b="0" i="1">
                 <a:solidFill>
-                  <a:srgbClr val="8C8C8C"/>
-                </a:solidFill>
-                <a:latin typeface="Arial"/>
-              </a:rPr>
-              <a:t/>
+                  <a:srgbClr val="828282"/>
+                </a:solidFill>
+                <a:latin typeface="Arial"/>
+              </a:rPr>
+              <a:t>Vai com fé teu mal expor!</a:t>
             </a:r>
           </a:p>
         </p:txBody>
@@ -3926,23 +3856,23 @@
         </p:nvSpPr>
         <p:spPr>
           <a:xfrm>
-            <a:off x="594360" y="2258568"/>
-            <a:ext cx="11002975" cy="685800"/>
-          </a:xfrm>
-          <a:prstGeom prst="rect">
-            <a:avLst/>
-          </a:prstGeom>
-          <a:noFill/>
-        </p:spPr>
-        <p:txBody>
-          <a:bodyPr wrap="square">
-            <a:spAutoFit/>
-          </a:bodyPr>
-          <a:lstStyle/>
-          <a:p>
-            <a:pPr algn="ctr"/>
-            <a:r>
-              <a:rPr sz="4400" b="1" i="0">
+            <a:off x="640080" y="2052828"/>
+            <a:ext cx="10911535" cy="731520"/>
+          </a:xfrm>
+          <a:prstGeom prst="rect">
+            <a:avLst/>
+          </a:prstGeom>
+          <a:noFill/>
+        </p:spPr>
+        <p:txBody>
+          <a:bodyPr wrap="square">
+            <a:spAutoFit/>
+          </a:bodyPr>
+          <a:lstStyle/>
+          <a:p>
+            <a:pPr algn="ctr"/>
+            <a:r>
+              <a:rPr sz="4800" b="1" i="0">
                 <a:solidFill>
                   <a:srgbClr val="FFFFFF"/>
                 </a:solidFill>
@@ -3961,25 +3891,60 @@
         </p:nvSpPr>
         <p:spPr>
           <a:xfrm>
-            <a:off x="594360" y="2980944"/>
-            <a:ext cx="11002975" cy="347472"/>
-          </a:xfrm>
-          <a:prstGeom prst="rect">
-            <a:avLst/>
-          </a:prstGeom>
-          <a:noFill/>
-        </p:spPr>
-        <p:txBody>
-          <a:bodyPr wrap="square">
-            <a:spAutoFit/>
-          </a:bodyPr>
-          <a:lstStyle/>
-          <a:p>
-            <a:pPr algn="ctr"/>
-            <a:r>
-              <a:rPr sz="2200" b="0" i="1">
-                <a:solidFill>
-                  <a:srgbClr val="8C8C8C"/>
+            <a:off x="640080" y="2985516"/>
+            <a:ext cx="10911535" cy="731520"/>
+          </a:xfrm>
+          <a:prstGeom prst="rect">
+            <a:avLst/>
+          </a:prstGeom>
+          <a:noFill/>
+        </p:spPr>
+        <p:txBody>
+          <a:bodyPr wrap="square">
+            <a:spAutoFit/>
+          </a:bodyPr>
+          <a:lstStyle/>
+          <a:p>
+            <a:pPr algn="ctr"/>
+            <a:r>
+              <a:rPr sz="4800" b="1" i="0">
+                <a:solidFill>
+                  <a:srgbClr val="FFFFFF"/>
+                </a:solidFill>
+                <a:latin typeface="Arial"/>
+              </a:rPr>
+              <a:t>Disto provas nos mostrou,</a:t>
+            </a:r>
+          </a:p>
+        </p:txBody>
+      </p:sp>
+      <p:sp>
+        <p:nvSpPr>
+          <p:cNvPr id="4" name="TextBox 3"/>
+          <p:cNvSpPr txBox="1"/>
+          <p:nvPr/>
+        </p:nvSpPr>
+        <p:spPr>
+          <a:xfrm>
+            <a:off x="640080" y="4128516"/>
+            <a:ext cx="10911535" cy="310896"/>
+          </a:xfrm>
+          <a:prstGeom prst="rect">
+            <a:avLst/>
+          </a:prstGeom>
+          <a:noFill/>
+        </p:spPr>
+        <p:txBody>
+          <a:bodyPr wrap="square">
+            <a:spAutoFit/>
+          </a:bodyPr>
+          <a:lstStyle/>
+          <a:p>
+            <a:pPr algn="ctr"/>
+            <a:r>
+              <a:rPr sz="2000" b="0" i="0">
+                <a:solidFill>
+                  <a:srgbClr val="828282"/>
                 </a:solidFill>
                 <a:latin typeface="Arial"/>
               </a:rPr>
@@ -3990,66 +3955,31 @@
       </p:sp>
       <p:sp>
         <p:nvSpPr>
-          <p:cNvPr id="4" name="TextBox 3"/>
-          <p:cNvSpPr txBox="1"/>
-          <p:nvPr/>
-        </p:nvSpPr>
-        <p:spPr>
-          <a:xfrm>
-            <a:off x="594360" y="3529584"/>
-            <a:ext cx="11002975" cy="685800"/>
-          </a:xfrm>
-          <a:prstGeom prst="rect">
-            <a:avLst/>
-          </a:prstGeom>
-          <a:noFill/>
-        </p:spPr>
-        <p:txBody>
-          <a:bodyPr wrap="square">
-            <a:spAutoFit/>
-          </a:bodyPr>
-          <a:lstStyle/>
-          <a:p>
-            <a:pPr algn="ctr"/>
-            <a:r>
-              <a:rPr sz="4400" b="1" i="0">
-                <a:solidFill>
-                  <a:srgbClr val="FFFFFF"/>
-                </a:solidFill>
-                <a:latin typeface="Arial"/>
-              </a:rPr>
-              <a:t>Disto provas nos mostrou,</a:t>
-            </a:r>
-          </a:p>
-        </p:txBody>
-      </p:sp>
-      <p:sp>
-        <p:nvSpPr>
           <p:cNvPr id="5" name="TextBox 4"/>
           <p:cNvSpPr txBox="1"/>
           <p:nvPr/>
         </p:nvSpPr>
         <p:spPr>
           <a:xfrm>
-            <a:off x="594360" y="4251960"/>
-            <a:ext cx="11002975" cy="347472"/>
-          </a:xfrm>
-          <a:prstGeom prst="rect">
-            <a:avLst/>
-          </a:prstGeom>
-          <a:noFill/>
-        </p:spPr>
-        <p:txBody>
-          <a:bodyPr wrap="square">
-            <a:spAutoFit/>
-          </a:bodyPr>
-          <a:lstStyle/>
-          <a:p>
-            <a:pPr algn="ctr"/>
-            <a:r>
-              <a:rPr sz="2200" b="0" i="1">
-                <a:solidFill>
-                  <a:srgbClr val="8C8C8C"/>
+            <a:off x="640080" y="4494276"/>
+            <a:ext cx="10911535" cy="310896"/>
+          </a:xfrm>
+          <a:prstGeom prst="rect">
+            <a:avLst/>
+          </a:prstGeom>
+          <a:noFill/>
+        </p:spPr>
+        <p:txBody>
+          <a:bodyPr wrap="square">
+            <a:spAutoFit/>
+          </a:bodyPr>
+          <a:lstStyle/>
+          <a:p>
+            <a:pPr algn="ctr"/>
+            <a:r>
+              <a:rPr sz="2000" b="0" i="0">
+                <a:solidFill>
+                  <a:srgbClr val="828282"/>
                 </a:solidFill>
                 <a:latin typeface="Arial"/>
               </a:rPr>
@@ -4092,23 +4022,23 @@
         </p:nvSpPr>
         <p:spPr>
           <a:xfrm>
-            <a:off x="594360" y="2258568"/>
-            <a:ext cx="11002975" cy="685800"/>
-          </a:xfrm>
-          <a:prstGeom prst="rect">
-            <a:avLst/>
-          </a:prstGeom>
-          <a:noFill/>
-        </p:spPr>
-        <p:txBody>
-          <a:bodyPr wrap="square">
-            <a:spAutoFit/>
-          </a:bodyPr>
-          <a:lstStyle/>
-          <a:p>
-            <a:pPr algn="ctr"/>
-            <a:r>
-              <a:rPr sz="4400" b="1" i="0">
+            <a:off x="640080" y="2052828"/>
+            <a:ext cx="10911535" cy="731520"/>
+          </a:xfrm>
+          <a:prstGeom prst="rect">
+            <a:avLst/>
+          </a:prstGeom>
+          <a:noFill/>
+        </p:spPr>
+        <p:txBody>
+          <a:bodyPr wrap="square">
+            <a:spAutoFit/>
+          </a:bodyPr>
+          <a:lstStyle/>
+          <a:p>
+            <a:pPr algn="ctr"/>
+            <a:r>
+              <a:rPr sz="4800" b="1" i="0">
                 <a:solidFill>
                   <a:srgbClr val="FFFFFF"/>
                 </a:solidFill>
@@ -4127,25 +4057,60 @@
         </p:nvSpPr>
         <p:spPr>
           <a:xfrm>
-            <a:off x="594360" y="2980944"/>
-            <a:ext cx="11002975" cy="347472"/>
-          </a:xfrm>
-          <a:prstGeom prst="rect">
-            <a:avLst/>
-          </a:prstGeom>
-          <a:noFill/>
-        </p:spPr>
-        <p:txBody>
-          <a:bodyPr wrap="square">
-            <a:spAutoFit/>
-          </a:bodyPr>
-          <a:lstStyle/>
-          <a:p>
-            <a:pPr algn="ctr"/>
-            <a:r>
-              <a:rPr sz="2200" b="0" i="1">
-                <a:solidFill>
-                  <a:srgbClr val="8C8C8C"/>
+            <a:off x="640080" y="2985516"/>
+            <a:ext cx="10911535" cy="731520"/>
+          </a:xfrm>
+          <a:prstGeom prst="rect">
+            <a:avLst/>
+          </a:prstGeom>
+          <a:noFill/>
+        </p:spPr>
+        <p:txBody>
+          <a:bodyPr wrap="square">
+            <a:spAutoFit/>
+          </a:bodyPr>
+          <a:lstStyle/>
+          <a:p>
+            <a:pPr algn="ctr"/>
+            <a:r>
+              <a:rPr sz="4800" b="1" i="0">
+                <a:solidFill>
+                  <a:srgbClr val="FFFFFF"/>
+                </a:solidFill>
+                <a:latin typeface="Arial"/>
+              </a:rPr>
+              <a:t>O culpado encarnou.</a:t>
+            </a:r>
+          </a:p>
+        </p:txBody>
+      </p:sp>
+      <p:sp>
+        <p:nvSpPr>
+          <p:cNvPr id="4" name="TextBox 3"/>
+          <p:cNvSpPr txBox="1"/>
+          <p:nvPr/>
+        </p:nvSpPr>
+        <p:spPr>
+          <a:xfrm>
+            <a:off x="640080" y="4128516"/>
+            <a:ext cx="10911535" cy="310896"/>
+          </a:xfrm>
+          <a:prstGeom prst="rect">
+            <a:avLst/>
+          </a:prstGeom>
+          <a:noFill/>
+        </p:spPr>
+        <p:txBody>
+          <a:bodyPr wrap="square">
+            <a:spAutoFit/>
+          </a:bodyPr>
+          <a:lstStyle/>
+          <a:p>
+            <a:pPr algn="ctr"/>
+            <a:r>
+              <a:rPr sz="2000" b="0" i="0">
+                <a:solidFill>
+                  <a:srgbClr val="828282"/>
                 </a:solidFill>
                 <a:latin typeface="Arial"/>
               </a:rPr>
@@ -4156,66 +4121,31 @@
       </p:sp>
       <p:sp>
         <p:nvSpPr>
-          <p:cNvPr id="4" name="TextBox 3"/>
-          <p:cNvSpPr txBox="1"/>
-          <p:nvPr/>
-        </p:nvSpPr>
-        <p:spPr>
-          <a:xfrm>
-            <a:off x="594360" y="3529584"/>
-            <a:ext cx="11002975" cy="685800"/>
-          </a:xfrm>
-          <a:prstGeom prst="rect">
-            <a:avLst/>
-          </a:prstGeom>
-          <a:noFill/>
-        </p:spPr>
-        <p:txBody>
-          <a:bodyPr wrap="square">
-            <a:spAutoFit/>
-          </a:bodyPr>
-          <a:lstStyle/>
-          <a:p>
-            <a:pPr algn="ctr"/>
-            <a:r>
-              <a:rPr sz="4400" b="1" i="0">
-                <a:solidFill>
-                  <a:srgbClr val="FFFFFF"/>
-                </a:solidFill>
-                <a:latin typeface="Arial"/>
-              </a:rPr>
-              <a:t>O culpado encarnou.</a:t>
-            </a:r>
-          </a:p>
-        </p:txBody>
-      </p:sp>
-      <p:sp>
-        <p:nvSpPr>
           <p:cNvPr id="5" name="TextBox 4"/>
           <p:cNvSpPr txBox="1"/>
           <p:nvPr/>
         </p:nvSpPr>
         <p:spPr>
           <a:xfrm>
-            <a:off x="594360" y="4251960"/>
-            <a:ext cx="11002975" cy="347472"/>
-          </a:xfrm>
-          <a:prstGeom prst="rect">
-            <a:avLst/>
-          </a:prstGeom>
-          <a:noFill/>
-        </p:spPr>
-        <p:txBody>
-          <a:bodyPr wrap="square">
-            <a:spAutoFit/>
-          </a:bodyPr>
-          <a:lstStyle/>
-          <a:p>
-            <a:pPr algn="ctr"/>
-            <a:r>
-              <a:rPr sz="2200" b="0" i="1">
-                <a:solidFill>
-                  <a:srgbClr val="8C8C8C"/>
+            <a:off x="640080" y="4494276"/>
+            <a:ext cx="10911535" cy="310896"/>
+          </a:xfrm>
+          <a:prstGeom prst="rect">
+            <a:avLst/>
+          </a:prstGeom>
+          <a:noFill/>
+        </p:spPr>
+        <p:txBody>
+          <a:bodyPr wrap="square">
+            <a:spAutoFit/>
+          </a:bodyPr>
+          <a:lstStyle/>
+          <a:p>
+            <a:pPr algn="ctr"/>
+            <a:r>
+              <a:rPr sz="2000" b="0" i="0">
+                <a:solidFill>
+                  <a:srgbClr val="828282"/>
                 </a:solidFill>
                 <a:latin typeface="Arial"/>
               </a:rPr>
@@ -4258,23 +4188,23 @@
         </p:nvSpPr>
         <p:spPr>
           <a:xfrm>
-            <a:off x="594360" y="2258568"/>
-            <a:ext cx="11002975" cy="685800"/>
-          </a:xfrm>
-          <a:prstGeom prst="rect">
-            <a:avLst/>
-          </a:prstGeom>
-          <a:noFill/>
-        </p:spPr>
-        <p:txBody>
-          <a:bodyPr wrap="square">
-            <a:spAutoFit/>
-          </a:bodyPr>
-          <a:lstStyle/>
-          <a:p>
-            <a:pPr algn="ctr"/>
-            <a:r>
-              <a:rPr sz="4400" b="1" i="0">
+            <a:off x="640080" y="2052828"/>
+            <a:ext cx="10911535" cy="731520"/>
+          </a:xfrm>
+          <a:prstGeom prst="rect">
+            <a:avLst/>
+          </a:prstGeom>
+          <a:noFill/>
+        </p:spPr>
+        <p:txBody>
+          <a:bodyPr wrap="square">
+            <a:spAutoFit/>
+          </a:bodyPr>
+          <a:lstStyle/>
+          <a:p>
+            <a:pPr algn="ctr"/>
+            <a:r>
+              <a:rPr sz="4800" b="1" i="0">
                 <a:solidFill>
                   <a:srgbClr val="FFFFFF"/>
                 </a:solidFill>
@@ -4293,99 +4223,29 @@
         </p:nvSpPr>
         <p:spPr>
           <a:xfrm>
-            <a:off x="594360" y="2980944"/>
-            <a:ext cx="11002975" cy="347472"/>
-          </a:xfrm>
-          <a:prstGeom prst="rect">
-            <a:avLst/>
-          </a:prstGeom>
-          <a:noFill/>
-        </p:spPr>
-        <p:txBody>
-          <a:bodyPr wrap="square">
-            <a:spAutoFit/>
-          </a:bodyPr>
-          <a:lstStyle/>
-          <a:p>
-            <a:pPr algn="ctr"/>
-            <a:r>
-              <a:rPr sz="2200" b="0" i="1">
-                <a:solidFill>
-                  <a:srgbClr val="8C8C8C"/>
-                </a:solidFill>
-                <a:latin typeface="Arial"/>
-              </a:rPr>
-              <a:t/>
-            </a:r>
-          </a:p>
-        </p:txBody>
-      </p:sp>
-      <p:sp>
-        <p:nvSpPr>
-          <p:cNvPr id="4" name="TextBox 3"/>
-          <p:cNvSpPr txBox="1"/>
-          <p:nvPr/>
-        </p:nvSpPr>
-        <p:spPr>
-          <a:xfrm>
-            <a:off x="594360" y="3529584"/>
-            <a:ext cx="11002975" cy="685800"/>
-          </a:xfrm>
-          <a:prstGeom prst="rect">
-            <a:avLst/>
-          </a:prstGeom>
-          <a:noFill/>
-        </p:spPr>
-        <p:txBody>
-          <a:bodyPr wrap="square">
-            <a:spAutoFit/>
-          </a:bodyPr>
-          <a:lstStyle/>
-          <a:p>
-            <a:pPr algn="ctr"/>
-            <a:r>
-              <a:rPr sz="4400" b="1" i="0">
+            <a:off x="640080" y="2985516"/>
+            <a:ext cx="10911535" cy="731520"/>
+          </a:xfrm>
+          <a:prstGeom prst="rect">
+            <a:avLst/>
+          </a:prstGeom>
+          <a:noFill/>
+        </p:spPr>
+        <p:txBody>
+          <a:bodyPr wrap="square">
+            <a:spAutoFit/>
+          </a:bodyPr>
+          <a:lstStyle/>
+          <a:p>
+            <a:pPr algn="ctr"/>
+            <a:r>
+              <a:rPr sz="4800" b="1" i="0">
                 <a:solidFill>
                   <a:srgbClr val="FFFFFF"/>
                 </a:solidFill>
                 <a:latin typeface="Arial"/>
               </a:rPr>
               <a:t>Nossa mancha pra lavar;</a:t>
-            </a:r>
-          </a:p>
-        </p:txBody>
-      </p:sp>
-      <p:sp>
-        <p:nvSpPr>
-          <p:cNvPr id="5" name="TextBox 4"/>
-          <p:cNvSpPr txBox="1"/>
-          <p:nvPr/>
-        </p:nvSpPr>
-        <p:spPr>
-          <a:xfrm>
-            <a:off x="594360" y="4251960"/>
-            <a:ext cx="11002975" cy="347472"/>
-          </a:xfrm>
-          <a:prstGeom prst="rect">
-            <a:avLst/>
-          </a:prstGeom>
-          <a:noFill/>
-        </p:spPr>
-        <p:txBody>
-          <a:bodyPr wrap="square">
-            <a:spAutoFit/>
-          </a:bodyPr>
-          <a:lstStyle/>
-          <a:p>
-            <a:pPr algn="ctr"/>
-            <a:r>
-              <a:rPr sz="2200" b="0" i="1">
-                <a:solidFill>
-                  <a:srgbClr val="8C8C8C"/>
-                </a:solidFill>
-                <a:latin typeface="Arial"/>
-              </a:rPr>
-              <a:t/>
             </a:r>
           </a:p>
         </p:txBody>
@@ -4424,23 +4284,23 @@
         </p:nvSpPr>
         <p:spPr>
           <a:xfrm>
-            <a:off x="594360" y="2258568"/>
-            <a:ext cx="11002975" cy="685800"/>
-          </a:xfrm>
-          <a:prstGeom prst="rect">
-            <a:avLst/>
-          </a:prstGeom>
-          <a:noFill/>
-        </p:spPr>
-        <p:txBody>
-          <a:bodyPr wrap="square">
-            <a:spAutoFit/>
-          </a:bodyPr>
-          <a:lstStyle/>
-          <a:p>
-            <a:pPr algn="ctr"/>
-            <a:r>
-              <a:rPr sz="4400" b="1" i="0">
+            <a:off x="640080" y="2052828"/>
+            <a:ext cx="10911535" cy="731520"/>
+          </a:xfrm>
+          <a:prstGeom prst="rect">
+            <a:avLst/>
+          </a:prstGeom>
+          <a:noFill/>
+        </p:spPr>
+        <p:txBody>
+          <a:bodyPr wrap="square">
+            <a:spAutoFit/>
+          </a:bodyPr>
+          <a:lstStyle/>
+          <a:p>
+            <a:pPr algn="ctr"/>
+            <a:r>
+              <a:rPr sz="4800" b="1" i="0">
                 <a:solidFill>
                   <a:srgbClr val="FFFFFF"/>
                 </a:solidFill>
@@ -4459,99 +4319,29 @@
         </p:nvSpPr>
         <p:spPr>
           <a:xfrm>
-            <a:off x="594360" y="2980944"/>
-            <a:ext cx="11002975" cy="347472"/>
-          </a:xfrm>
-          <a:prstGeom prst="rect">
-            <a:avLst/>
-          </a:prstGeom>
-          <a:noFill/>
-        </p:spPr>
-        <p:txBody>
-          <a:bodyPr wrap="square">
-            <a:spAutoFit/>
-          </a:bodyPr>
-          <a:lstStyle/>
-          <a:p>
-            <a:pPr algn="ctr"/>
-            <a:r>
-              <a:rPr sz="2200" b="0" i="1">
-                <a:solidFill>
-                  <a:srgbClr val="8C8C8C"/>
-                </a:solidFill>
-                <a:latin typeface="Arial"/>
-              </a:rPr>
-              <a:t/>
-            </a:r>
-          </a:p>
-        </p:txBody>
-      </p:sp>
-      <p:sp>
-        <p:nvSpPr>
-          <p:cNvPr id="4" name="TextBox 3"/>
-          <p:cNvSpPr txBox="1"/>
-          <p:nvPr/>
-        </p:nvSpPr>
-        <p:spPr>
-          <a:xfrm>
-            <a:off x="594360" y="3529584"/>
-            <a:ext cx="11002975" cy="685800"/>
-          </a:xfrm>
-          <a:prstGeom prst="rect">
-            <a:avLst/>
-          </a:prstGeom>
-          <a:noFill/>
-        </p:spPr>
-        <p:txBody>
-          <a:bodyPr wrap="square">
-            <a:spAutoFit/>
-          </a:bodyPr>
-          <a:lstStyle/>
-          <a:p>
-            <a:pPr algn="ctr"/>
-            <a:r>
-              <a:rPr sz="4400" b="1" i="0">
+            <a:off x="640080" y="2985516"/>
+            <a:ext cx="10911535" cy="731520"/>
+          </a:xfrm>
+          <a:prstGeom prst="rect">
+            <a:avLst/>
+          </a:prstGeom>
+          <a:noFill/>
+        </p:spPr>
+        <p:txBody>
+          <a:bodyPr wrap="square">
+            <a:spAutoFit/>
+          </a:bodyPr>
+          <a:lstStyle/>
+          <a:p>
+            <a:pPr algn="ctr"/>
+            <a:r>
+              <a:rPr sz="4800" b="1" i="0">
                 <a:solidFill>
                   <a:srgbClr val="FFFFFF"/>
                 </a:solidFill>
                 <a:latin typeface="Arial"/>
               </a:rPr>
               <a:t>NEle podemos alcançar.</a:t>
-            </a:r>
-          </a:p>
-        </p:txBody>
-      </p:sp>
-      <p:sp>
-        <p:nvSpPr>
-          <p:cNvPr id="5" name="TextBox 4"/>
-          <p:cNvSpPr txBox="1"/>
-          <p:nvPr/>
-        </p:nvSpPr>
-        <p:spPr>
-          <a:xfrm>
-            <a:off x="594360" y="4251960"/>
-            <a:ext cx="11002975" cy="347472"/>
-          </a:xfrm>
-          <a:prstGeom prst="rect">
-            <a:avLst/>
-          </a:prstGeom>
-          <a:noFill/>
-        </p:spPr>
-        <p:txBody>
-          <a:bodyPr wrap="square">
-            <a:spAutoFit/>
-          </a:bodyPr>
-          <a:lstStyle/>
-          <a:p>
-            <a:pPr algn="ctr"/>
-            <a:r>
-              <a:rPr sz="2200" b="0" i="1">
-                <a:solidFill>
-                  <a:srgbClr val="8C8C8C"/>
-                </a:solidFill>
-                <a:latin typeface="Arial"/>
-              </a:rPr>
-              <a:t/>
             </a:r>
           </a:p>
         </p:txBody>
@@ -4590,23 +4380,23 @@
         </p:nvSpPr>
         <p:spPr>
           <a:xfrm>
-            <a:off x="594360" y="1837944"/>
-            <a:ext cx="11002975" cy="685800"/>
-          </a:xfrm>
-          <a:prstGeom prst="rect">
-            <a:avLst/>
-          </a:prstGeom>
-          <a:noFill/>
-        </p:spPr>
-        <p:txBody>
-          <a:bodyPr wrap="square">
-            <a:spAutoFit/>
-          </a:bodyPr>
-          <a:lstStyle/>
-          <a:p>
-            <a:pPr algn="ctr"/>
-            <a:r>
-              <a:rPr sz="4223" b="1" i="0">
+            <a:off x="640080" y="1650492"/>
+            <a:ext cx="10911535" cy="731520"/>
+          </a:xfrm>
+          <a:prstGeom prst="rect">
+            <a:avLst/>
+          </a:prstGeom>
+          <a:noFill/>
+        </p:spPr>
+        <p:txBody>
+          <a:bodyPr wrap="square">
+            <a:spAutoFit/>
+          </a:bodyPr>
+          <a:lstStyle/>
+          <a:p>
+            <a:pPr algn="ctr"/>
+            <a:r>
+              <a:rPr sz="4600" b="1" i="0">
                 <a:solidFill>
                   <a:srgbClr val="FFFFFF"/>
                 </a:solidFill>
@@ -4625,8 +4415,8 @@
         </p:nvSpPr>
         <p:spPr>
           <a:xfrm>
-            <a:off x="594360" y="2560320"/>
-            <a:ext cx="11002975" cy="384048"/>
+            <a:off x="640080" y="2418588"/>
+            <a:ext cx="10911535" cy="365760"/>
           </a:xfrm>
           <a:prstGeom prst="rect">
             <a:avLst/>
@@ -4643,7 +4433,7 @@
             <a:r>
               <a:rPr sz="2400" b="0" i="1">
                 <a:solidFill>
-                  <a:srgbClr val="B4B4B4"/>
+                  <a:srgbClr val="AAAAAA"/>
                 </a:solidFill>
                 <a:latin typeface="Arial"/>
               </a:rPr>
@@ -4660,8 +4450,78 @@
         </p:nvSpPr>
         <p:spPr>
           <a:xfrm>
-            <a:off x="594360" y="2980944"/>
-            <a:ext cx="11002975" cy="347472"/>
+            <a:off x="640080" y="2985516"/>
+            <a:ext cx="10911535" cy="731520"/>
+          </a:xfrm>
+          <a:prstGeom prst="rect">
+            <a:avLst/>
+          </a:prstGeom>
+          <a:noFill/>
+        </p:spPr>
+        <p:txBody>
+          <a:bodyPr wrap="square">
+            <a:spAutoFit/>
+          </a:bodyPr>
+          <a:lstStyle/>
+          <a:p>
+            <a:pPr algn="ctr"/>
+            <a:r>
+              <a:rPr sz="4800" b="1" i="0">
+                <a:solidFill>
+                  <a:srgbClr val="FFFFFF"/>
+                </a:solidFill>
+                <a:latin typeface="Arial"/>
+              </a:rPr>
+              <a:t>かわらぬ   愛もて  みちびきたもう</a:t>
+            </a:r>
+          </a:p>
+        </p:txBody>
+      </p:sp>
+      <p:sp>
+        <p:nvSpPr>
+          <p:cNvPr id="5" name="TextBox 4"/>
+          <p:cNvSpPr txBox="1"/>
+          <p:nvPr/>
+        </p:nvSpPr>
+        <p:spPr>
+          <a:xfrm>
+            <a:off x="640080" y="3753612"/>
+            <a:ext cx="10911535" cy="365760"/>
+          </a:xfrm>
+          <a:prstGeom prst="rect">
+            <a:avLst/>
+          </a:prstGeom>
+          <a:noFill/>
+        </p:spPr>
+        <p:txBody>
+          <a:bodyPr wrap="square">
+            <a:spAutoFit/>
+          </a:bodyPr>
+          <a:lstStyle/>
+          <a:p>
+            <a:pPr algn="ctr"/>
+            <a:r>
+              <a:rPr sz="2400" b="0" i="1">
+                <a:solidFill>
+                  <a:srgbClr val="AAAAAA"/>
+                </a:solidFill>
+                <a:latin typeface="Arial"/>
+              </a:rPr>
+              <a:t>ka-wa ranua imote mi-chi bikita mou</a:t>
+            </a:r>
+          </a:p>
+        </p:txBody>
+      </p:sp>
+      <p:sp>
+        <p:nvSpPr>
+          <p:cNvPr id="6" name="TextBox 5"/>
+          <p:cNvSpPr txBox="1"/>
+          <p:nvPr/>
+        </p:nvSpPr>
+        <p:spPr>
+          <a:xfrm>
+            <a:off x="640080" y="4530852"/>
+            <a:ext cx="10911535" cy="310896"/>
           </a:xfrm>
           <a:prstGeom prst="rect">
             <a:avLst/>
@@ -4678,7 +4538,7 @@
             <a:r>
               <a:rPr sz="2000" b="0" i="1">
                 <a:solidFill>
-                  <a:srgbClr val="8C8C8C"/>
+                  <a:srgbClr val="828282"/>
                 </a:solidFill>
                 <a:latin typeface="Arial"/>
               </a:rPr>
@@ -4689,84 +4549,14 @@
       </p:sp>
       <p:sp>
         <p:nvSpPr>
-          <p:cNvPr id="5" name="TextBox 4"/>
-          <p:cNvSpPr txBox="1"/>
-          <p:nvPr/>
-        </p:nvSpPr>
-        <p:spPr>
-          <a:xfrm>
-            <a:off x="594360" y="3529584"/>
-            <a:ext cx="11002975" cy="685800"/>
-          </a:xfrm>
-          <a:prstGeom prst="rect">
-            <a:avLst/>
-          </a:prstGeom>
-          <a:noFill/>
-        </p:spPr>
-        <p:txBody>
-          <a:bodyPr wrap="square">
-            <a:spAutoFit/>
-          </a:bodyPr>
-          <a:lstStyle/>
-          <a:p>
-            <a:pPr algn="ctr"/>
-            <a:r>
-              <a:rPr sz="4400" b="1" i="0">
-                <a:solidFill>
-                  <a:srgbClr val="FFFFFF"/>
-                </a:solidFill>
-                <a:latin typeface="Arial"/>
-              </a:rPr>
-              <a:t>かわらぬ   愛もて  みちびきたもう</a:t>
-            </a:r>
-          </a:p>
-        </p:txBody>
-      </p:sp>
-      <p:sp>
-        <p:nvSpPr>
-          <p:cNvPr id="6" name="TextBox 5"/>
-          <p:cNvSpPr txBox="1"/>
-          <p:nvPr/>
-        </p:nvSpPr>
-        <p:spPr>
-          <a:xfrm>
-            <a:off x="594360" y="4251960"/>
-            <a:ext cx="11002975" cy="384048"/>
-          </a:xfrm>
-          <a:prstGeom prst="rect">
-            <a:avLst/>
-          </a:prstGeom>
-          <a:noFill/>
-        </p:spPr>
-        <p:txBody>
-          <a:bodyPr wrap="square">
-            <a:spAutoFit/>
-          </a:bodyPr>
-          <a:lstStyle/>
-          <a:p>
-            <a:pPr algn="ctr"/>
-            <a:r>
-              <a:rPr sz="2400" b="0" i="1">
-                <a:solidFill>
-                  <a:srgbClr val="B4B4B4"/>
-                </a:solidFill>
-                <a:latin typeface="Arial"/>
-              </a:rPr>
-              <a:t>ka-wa ranua imote mi-chi bikita mou</a:t>
-            </a:r>
-          </a:p>
-        </p:txBody>
-      </p:sp>
-      <p:sp>
-        <p:nvSpPr>
           <p:cNvPr id="7" name="TextBox 6"/>
           <p:cNvSpPr txBox="1"/>
           <p:nvPr/>
         </p:nvSpPr>
         <p:spPr>
           <a:xfrm>
-            <a:off x="594360" y="4672584"/>
-            <a:ext cx="11002975" cy="347472"/>
+            <a:off x="640080" y="4896612"/>
+            <a:ext cx="10911535" cy="310896"/>
           </a:xfrm>
           <a:prstGeom prst="rect">
             <a:avLst/>
@@ -4783,7 +4573,7 @@
             <a:r>
               <a:rPr sz="2000" b="0" i="1">
                 <a:solidFill>
-                  <a:srgbClr val="8C8C8C"/>
+                  <a:srgbClr val="828282"/>
                 </a:solidFill>
                 <a:latin typeface="Arial"/>
               </a:rPr>
@@ -4826,23 +4616,23 @@
         </p:nvSpPr>
         <p:spPr>
           <a:xfrm>
-            <a:off x="594360" y="1837944"/>
-            <a:ext cx="11002975" cy="685800"/>
-          </a:xfrm>
-          <a:prstGeom prst="rect">
-            <a:avLst/>
-          </a:prstGeom>
-          <a:noFill/>
-        </p:spPr>
-        <p:txBody>
-          <a:bodyPr wrap="square">
-            <a:spAutoFit/>
-          </a:bodyPr>
-          <a:lstStyle/>
-          <a:p>
-            <a:pPr algn="ctr"/>
-            <a:r>
-              <a:rPr sz="4400" b="1" i="0">
+            <a:off x="640080" y="1650492"/>
+            <a:ext cx="10911535" cy="731520"/>
+          </a:xfrm>
+          <a:prstGeom prst="rect">
+            <a:avLst/>
+          </a:prstGeom>
+          <a:noFill/>
+        </p:spPr>
+        <p:txBody>
+          <a:bodyPr wrap="square">
+            <a:spAutoFit/>
+          </a:bodyPr>
+          <a:lstStyle/>
+          <a:p>
+            <a:pPr algn="ctr"/>
+            <a:r>
+              <a:rPr sz="4800" b="1" i="0">
                 <a:solidFill>
                   <a:srgbClr val="FFFFFF"/>
                 </a:solidFill>
@@ -4861,8 +4651,8 @@
         </p:nvSpPr>
         <p:spPr>
           <a:xfrm>
-            <a:off x="594360" y="2560320"/>
-            <a:ext cx="11002975" cy="384048"/>
+            <a:off x="640080" y="2418588"/>
+            <a:ext cx="10911535" cy="365760"/>
           </a:xfrm>
           <a:prstGeom prst="rect">
             <a:avLst/>
@@ -4879,7 +4669,7 @@
             <a:r>
               <a:rPr sz="2400" b="0" i="1">
                 <a:solidFill>
-                  <a:srgbClr val="B4B4B4"/>
+                  <a:srgbClr val="AAAAAA"/>
                 </a:solidFill>
                 <a:latin typeface="Arial"/>
               </a:rPr>
@@ -4896,8 +4686,78 @@
         </p:nvSpPr>
         <p:spPr>
           <a:xfrm>
-            <a:off x="594360" y="2980944"/>
-            <a:ext cx="11002975" cy="347472"/>
+            <a:off x="640080" y="2985516"/>
+            <a:ext cx="10911535" cy="731520"/>
+          </a:xfrm>
+          <a:prstGeom prst="rect">
+            <a:avLst/>
+          </a:prstGeom>
+          <a:noFill/>
+        </p:spPr>
+        <p:txBody>
+          <a:bodyPr wrap="square">
+            <a:spAutoFit/>
+          </a:bodyPr>
+          <a:lstStyle/>
+          <a:p>
+            <a:pPr algn="ctr"/>
+            <a:r>
+              <a:rPr sz="4800" b="1" i="0">
+                <a:solidFill>
+                  <a:srgbClr val="FFFFFF"/>
+                </a:solidFill>
+                <a:latin typeface="Arial"/>
+              </a:rPr>
+              <a:t>祈りにこたえて いたわりたまわん</a:t>
+            </a:r>
+          </a:p>
+        </p:txBody>
+      </p:sp>
+      <p:sp>
+        <p:nvSpPr>
+          <p:cNvPr id="5" name="TextBox 4"/>
+          <p:cNvSpPr txBox="1"/>
+          <p:nvPr/>
+        </p:nvSpPr>
+        <p:spPr>
+          <a:xfrm>
+            <a:off x="640080" y="3753612"/>
+            <a:ext cx="10911535" cy="365760"/>
+          </a:xfrm>
+          <a:prstGeom prst="rect">
+            <a:avLst/>
+          </a:prstGeom>
+          <a:noFill/>
+        </p:spPr>
+        <p:txBody>
+          <a:bodyPr wrap="square">
+            <a:spAutoFit/>
+          </a:bodyPr>
+          <a:lstStyle/>
+          <a:p>
+            <a:pPr algn="ctr"/>
+            <a:r>
+              <a:rPr sz="2400" b="0" i="1">
+                <a:solidFill>
+                  <a:srgbClr val="AAAAAA"/>
+                </a:solidFill>
+                <a:latin typeface="Arial"/>
+              </a:rPr>
+              <a:t>I-nori nikota ete i-tawari tama wan</a:t>
+            </a:r>
+          </a:p>
+        </p:txBody>
+      </p:sp>
+      <p:sp>
+        <p:nvSpPr>
+          <p:cNvPr id="6" name="TextBox 5"/>
+          <p:cNvSpPr txBox="1"/>
+          <p:nvPr/>
+        </p:nvSpPr>
+        <p:spPr>
+          <a:xfrm>
+            <a:off x="640080" y="4530852"/>
+            <a:ext cx="10911535" cy="310896"/>
           </a:xfrm>
           <a:prstGeom prst="rect">
             <a:avLst/>
@@ -4914,7 +4774,7 @@
             <a:r>
               <a:rPr sz="2000" b="0" i="1">
                 <a:solidFill>
-                  <a:srgbClr val="8C8C8C"/>
+                  <a:srgbClr val="828282"/>
                 </a:solidFill>
                 <a:latin typeface="Arial"/>
               </a:rPr>
@@ -4925,84 +4785,14 @@
       </p:sp>
       <p:sp>
         <p:nvSpPr>
-          <p:cNvPr id="5" name="TextBox 4"/>
-          <p:cNvSpPr txBox="1"/>
-          <p:nvPr/>
-        </p:nvSpPr>
-        <p:spPr>
-          <a:xfrm>
-            <a:off x="594360" y="3529584"/>
-            <a:ext cx="11002975" cy="685800"/>
-          </a:xfrm>
-          <a:prstGeom prst="rect">
-            <a:avLst/>
-          </a:prstGeom>
-          <a:noFill/>
-        </p:spPr>
-        <p:txBody>
-          <a:bodyPr wrap="square">
-            <a:spAutoFit/>
-          </a:bodyPr>
-          <a:lstStyle/>
-          <a:p>
-            <a:pPr algn="ctr"/>
-            <a:r>
-              <a:rPr sz="4400" b="1" i="0">
-                <a:solidFill>
-                  <a:srgbClr val="FFFFFF"/>
-                </a:solidFill>
-                <a:latin typeface="Arial"/>
-              </a:rPr>
-              <a:t>祈りにこたえて いたわりたまわん</a:t>
-            </a:r>
-          </a:p>
-        </p:txBody>
-      </p:sp>
-      <p:sp>
-        <p:nvSpPr>
-          <p:cNvPr id="6" name="TextBox 5"/>
-          <p:cNvSpPr txBox="1"/>
-          <p:nvPr/>
-        </p:nvSpPr>
-        <p:spPr>
-          <a:xfrm>
-            <a:off x="594360" y="4251960"/>
-            <a:ext cx="11002975" cy="384048"/>
-          </a:xfrm>
-          <a:prstGeom prst="rect">
-            <a:avLst/>
-          </a:prstGeom>
-          <a:noFill/>
-        </p:spPr>
-        <p:txBody>
-          <a:bodyPr wrap="square">
-            <a:spAutoFit/>
-          </a:bodyPr>
-          <a:lstStyle/>
-          <a:p>
-            <a:pPr algn="ctr"/>
-            <a:r>
-              <a:rPr sz="2400" b="0" i="1">
-                <a:solidFill>
-                  <a:srgbClr val="B4B4B4"/>
-                </a:solidFill>
-                <a:latin typeface="Arial"/>
-              </a:rPr>
-              <a:t>I-nori nikota ete i-tawari tama wan</a:t>
-            </a:r>
-          </a:p>
-        </p:txBody>
-      </p:sp>
-      <p:sp>
-        <p:nvSpPr>
           <p:cNvPr id="7" name="TextBox 6"/>
           <p:cNvSpPr txBox="1"/>
           <p:nvPr/>
         </p:nvSpPr>
         <p:spPr>
           <a:xfrm>
-            <a:off x="594360" y="4672584"/>
-            <a:ext cx="11002975" cy="347472"/>
+            <a:off x="640080" y="4896612"/>
+            <a:ext cx="10911535" cy="310896"/>
           </a:xfrm>
           <a:prstGeom prst="rect">
             <a:avLst/>
@@ -5019,7 +4809,7 @@
             <a:r>
               <a:rPr sz="2000" b="0" i="1">
                 <a:solidFill>
-                  <a:srgbClr val="8C8C8C"/>
+                  <a:srgbClr val="828282"/>
                 </a:solidFill>
                 <a:latin typeface="Arial"/>
               </a:rPr>
@@ -5062,23 +4852,23 @@
         </p:nvSpPr>
         <p:spPr>
           <a:xfrm>
-            <a:off x="594360" y="1837944"/>
-            <a:ext cx="11002975" cy="685800"/>
-          </a:xfrm>
-          <a:prstGeom prst="rect">
-            <a:avLst/>
-          </a:prstGeom>
-          <a:noFill/>
-        </p:spPr>
-        <p:txBody>
-          <a:bodyPr wrap="square">
-            <a:spAutoFit/>
-          </a:bodyPr>
-          <a:lstStyle/>
-          <a:p>
-            <a:pPr algn="ctr"/>
-            <a:r>
-              <a:rPr sz="4400" b="1" i="0">
+            <a:off x="640080" y="1650492"/>
+            <a:ext cx="10911535" cy="731520"/>
+          </a:xfrm>
+          <a:prstGeom prst="rect">
+            <a:avLst/>
+          </a:prstGeom>
+          <a:noFill/>
+        </p:spPr>
+        <p:txBody>
+          <a:bodyPr wrap="square">
+            <a:spAutoFit/>
+          </a:bodyPr>
+          <a:lstStyle/>
+          <a:p>
+            <a:pPr algn="ctr"/>
+            <a:r>
+              <a:rPr sz="4800" b="1" i="0">
                 <a:solidFill>
                   <a:srgbClr val="FFFFFF"/>
                 </a:solidFill>
@@ -5097,8 +4887,8 @@
         </p:nvSpPr>
         <p:spPr>
           <a:xfrm>
-            <a:off x="594360" y="2560320"/>
-            <a:ext cx="11002975" cy="384048"/>
+            <a:off x="640080" y="2418588"/>
+            <a:ext cx="10911535" cy="365760"/>
           </a:xfrm>
           <a:prstGeom prst="rect">
             <a:avLst/>
@@ -5115,7 +4905,7 @@
             <a:r>
               <a:rPr sz="2400" b="0" i="1">
                 <a:solidFill>
-                  <a:srgbClr val="B4B4B4"/>
+                  <a:srgbClr val="AAAAAA"/>
                 </a:solidFill>
                 <a:latin typeface="Arial"/>
               </a:rPr>
@@ -5132,29 +4922,29 @@
         </p:nvSpPr>
         <p:spPr>
           <a:xfrm>
-            <a:off x="594360" y="2980944"/>
-            <a:ext cx="11002975" cy="347472"/>
-          </a:xfrm>
-          <a:prstGeom prst="rect">
-            <a:avLst/>
-          </a:prstGeom>
-          <a:noFill/>
-        </p:spPr>
-        <p:txBody>
-          <a:bodyPr wrap="square">
-            <a:spAutoFit/>
-          </a:bodyPr>
-          <a:lstStyle/>
-          <a:p>
-            <a:pPr algn="ctr"/>
-            <a:r>
-              <a:rPr sz="2000" b="0" i="1">
-                <a:solidFill>
-                  <a:srgbClr val="8C8C8C"/>
-                </a:solidFill>
-                <a:latin typeface="Arial"/>
-              </a:rPr>
-              <a:t/>
+            <a:off x="640080" y="2985516"/>
+            <a:ext cx="10911535" cy="731520"/>
+          </a:xfrm>
+          <a:prstGeom prst="rect">
+            <a:avLst/>
+          </a:prstGeom>
+          <a:noFill/>
+        </p:spPr>
+        <p:txBody>
+          <a:bodyPr wrap="square">
+            <a:spAutoFit/>
+          </a:bodyPr>
+          <a:lstStyle/>
+          <a:p>
+            <a:pPr algn="ctr"/>
+            <a:r>
+              <a:rPr sz="4600" b="1" i="0">
+                <a:solidFill>
+                  <a:srgbClr val="FFFFFF"/>
+                </a:solidFill>
+                <a:latin typeface="Arial"/>
+              </a:rPr>
+              <a:t>救いぬし     ぼく者 王    全てささげます</a:t>
             </a:r>
           </a:p>
         </p:txBody>
@@ -5167,43 +4957,8 @@
         </p:nvSpPr>
         <p:spPr>
           <a:xfrm>
-            <a:off x="594360" y="3529584"/>
-            <a:ext cx="11002975" cy="685800"/>
-          </a:xfrm>
-          <a:prstGeom prst="rect">
-            <a:avLst/>
-          </a:prstGeom>
-          <a:noFill/>
-        </p:spPr>
-        <p:txBody>
-          <a:bodyPr wrap="square">
-            <a:spAutoFit/>
-          </a:bodyPr>
-          <a:lstStyle/>
-          <a:p>
-            <a:pPr algn="ctr"/>
-            <a:r>
-              <a:rPr sz="4223" b="1" i="0">
-                <a:solidFill>
-                  <a:srgbClr val="FFFFFF"/>
-                </a:solidFill>
-                <a:latin typeface="Arial"/>
-              </a:rPr>
-              <a:t>救いぬし     ぼく者 王    全てささげます</a:t>
-            </a:r>
-          </a:p>
-        </p:txBody>
-      </p:sp>
-      <p:sp>
-        <p:nvSpPr>
-          <p:cNvPr id="6" name="TextBox 5"/>
-          <p:cNvSpPr txBox="1"/>
-          <p:nvPr/>
-        </p:nvSpPr>
-        <p:spPr>
-          <a:xfrm>
-            <a:off x="594360" y="4251960"/>
-            <a:ext cx="11002975" cy="384048"/>
+            <a:off x="640080" y="3753612"/>
+            <a:ext cx="10911535" cy="365760"/>
           </a:xfrm>
           <a:prstGeom prst="rect">
             <a:avLst/>
@@ -5220,46 +4975,11 @@
             <a:r>
               <a:rPr sz="2400" b="0" i="1">
                 <a:solidFill>
-                  <a:srgbClr val="B4B4B4"/>
+                  <a:srgbClr val="AAAAAA"/>
                 </a:solidFill>
                 <a:latin typeface="Arial"/>
               </a:rPr>
               <a:t>sukui nushi bokusha ou  subete sa sagemas</a:t>
-            </a:r>
-          </a:p>
-        </p:txBody>
-      </p:sp>
-      <p:sp>
-        <p:nvSpPr>
-          <p:cNvPr id="7" name="TextBox 6"/>
-          <p:cNvSpPr txBox="1"/>
-          <p:nvPr/>
-        </p:nvSpPr>
-        <p:spPr>
-          <a:xfrm>
-            <a:off x="594360" y="4672584"/>
-            <a:ext cx="11002975" cy="347472"/>
-          </a:xfrm>
-          <a:prstGeom prst="rect">
-            <a:avLst/>
-          </a:prstGeom>
-          <a:noFill/>
-        </p:spPr>
-        <p:txBody>
-          <a:bodyPr wrap="square">
-            <a:spAutoFit/>
-          </a:bodyPr>
-          <a:lstStyle/>
-          <a:p>
-            <a:pPr algn="ctr"/>
-            <a:r>
-              <a:rPr sz="2000" b="0" i="1">
-                <a:solidFill>
-                  <a:srgbClr val="8C8C8C"/>
-                </a:solidFill>
-                <a:latin typeface="Arial"/>
-              </a:rPr>
-              <a:t/>
             </a:r>
           </a:p>
         </p:txBody>
@@ -5298,23 +5018,23 @@
         </p:nvSpPr>
         <p:spPr>
           <a:xfrm>
-            <a:off x="594360" y="2258568"/>
-            <a:ext cx="11002975" cy="685800"/>
-          </a:xfrm>
-          <a:prstGeom prst="rect">
-            <a:avLst/>
-          </a:prstGeom>
-          <a:noFill/>
-        </p:spPr>
-        <p:txBody>
-          <a:bodyPr wrap="square">
-            <a:spAutoFit/>
-          </a:bodyPr>
-          <a:lstStyle/>
-          <a:p>
-            <a:pPr algn="ctr"/>
-            <a:r>
-              <a:rPr sz="4400" b="1" i="0">
+            <a:off x="640080" y="2052828"/>
+            <a:ext cx="10911535" cy="731520"/>
+          </a:xfrm>
+          <a:prstGeom prst="rect">
+            <a:avLst/>
+          </a:prstGeom>
+          <a:noFill/>
+        </p:spPr>
+        <p:txBody>
+          <a:bodyPr wrap="square">
+            <a:spAutoFit/>
+          </a:bodyPr>
+          <a:lstStyle/>
+          <a:p>
+            <a:pPr algn="ctr"/>
+            <a:r>
+              <a:rPr sz="4800" b="1" i="0">
                 <a:solidFill>
                   <a:srgbClr val="FFFFFF"/>
                 </a:solidFill>
@@ -5333,25 +5053,60 @@
         </p:nvSpPr>
         <p:spPr>
           <a:xfrm>
-            <a:off x="594360" y="2980944"/>
-            <a:ext cx="11002975" cy="347472"/>
-          </a:xfrm>
-          <a:prstGeom prst="rect">
-            <a:avLst/>
-          </a:prstGeom>
-          <a:noFill/>
-        </p:spPr>
-        <p:txBody>
-          <a:bodyPr wrap="square">
-            <a:spAutoFit/>
-          </a:bodyPr>
-          <a:lstStyle/>
-          <a:p>
-            <a:pPr algn="ctr"/>
-            <a:r>
-              <a:rPr sz="2200" b="0" i="1">
-                <a:solidFill>
-                  <a:srgbClr val="8C8C8C"/>
+            <a:off x="640080" y="2985516"/>
+            <a:ext cx="10911535" cy="731520"/>
+          </a:xfrm>
+          <a:prstGeom prst="rect">
+            <a:avLst/>
+          </a:prstGeom>
+          <a:noFill/>
+        </p:spPr>
+        <p:txBody>
+          <a:bodyPr wrap="square">
+            <a:spAutoFit/>
+          </a:bodyPr>
+          <a:lstStyle/>
+          <a:p>
+            <a:pPr algn="ctr"/>
+            <a:r>
+              <a:rPr sz="4800" b="1" i="0">
+                <a:solidFill>
+                  <a:srgbClr val="FFFFFF"/>
+                </a:solidFill>
+                <a:latin typeface="Arial"/>
+              </a:rPr>
+              <a:t>Os cuidados ao Senhor.</a:t>
+            </a:r>
+          </a:p>
+        </p:txBody>
+      </p:sp>
+      <p:sp>
+        <p:nvSpPr>
+          <p:cNvPr id="4" name="TextBox 3"/>
+          <p:cNvSpPr txBox="1"/>
+          <p:nvPr/>
+        </p:nvSpPr>
+        <p:spPr>
+          <a:xfrm>
+            <a:off x="640080" y="4128516"/>
+            <a:ext cx="10911535" cy="310896"/>
+          </a:xfrm>
+          <a:prstGeom prst="rect">
+            <a:avLst/>
+          </a:prstGeom>
+          <a:noFill/>
+        </p:spPr>
+        <p:txBody>
+          <a:bodyPr wrap="square">
+            <a:spAutoFit/>
+          </a:bodyPr>
+          <a:lstStyle/>
+          <a:p>
+            <a:pPr algn="ctr"/>
+            <a:r>
+              <a:rPr sz="2000" b="0" i="0">
+                <a:solidFill>
+                  <a:srgbClr val="828282"/>
                 </a:solidFill>
                 <a:latin typeface="Arial"/>
               </a:rPr>
@@ -5362,66 +5117,31 @@
       </p:sp>
       <p:sp>
         <p:nvSpPr>
-          <p:cNvPr id="4" name="TextBox 3"/>
-          <p:cNvSpPr txBox="1"/>
-          <p:nvPr/>
-        </p:nvSpPr>
-        <p:spPr>
-          <a:xfrm>
-            <a:off x="594360" y="3529584"/>
-            <a:ext cx="11002975" cy="685800"/>
-          </a:xfrm>
-          <a:prstGeom prst="rect">
-            <a:avLst/>
-          </a:prstGeom>
-          <a:noFill/>
-        </p:spPr>
-        <p:txBody>
-          <a:bodyPr wrap="square">
-            <a:spAutoFit/>
-          </a:bodyPr>
-          <a:lstStyle/>
-          <a:p>
-            <a:pPr algn="ctr"/>
-            <a:r>
-              <a:rPr sz="4400" b="1" i="0">
-                <a:solidFill>
-                  <a:srgbClr val="FFFFFF"/>
-                </a:solidFill>
-                <a:latin typeface="Arial"/>
-              </a:rPr>
-              <a:t>Os cuidados ao Senhor.</a:t>
-            </a:r>
-          </a:p>
-        </p:txBody>
-      </p:sp>
-      <p:sp>
-        <p:nvSpPr>
           <p:cNvPr id="5" name="TextBox 4"/>
           <p:cNvSpPr txBox="1"/>
           <p:nvPr/>
         </p:nvSpPr>
         <p:spPr>
           <a:xfrm>
-            <a:off x="594360" y="4251960"/>
-            <a:ext cx="11002975" cy="347472"/>
-          </a:xfrm>
-          <a:prstGeom prst="rect">
-            <a:avLst/>
-          </a:prstGeom>
-          <a:noFill/>
-        </p:spPr>
-        <p:txBody>
-          <a:bodyPr wrap="square">
-            <a:spAutoFit/>
-          </a:bodyPr>
-          <a:lstStyle/>
-          <a:p>
-            <a:pPr algn="ctr"/>
-            <a:r>
-              <a:rPr sz="2200" b="0" i="1">
-                <a:solidFill>
-                  <a:srgbClr val="8C8C8C"/>
+            <a:off x="640080" y="4494276"/>
+            <a:ext cx="10911535" cy="310896"/>
+          </a:xfrm>
+          <a:prstGeom prst="rect">
+            <a:avLst/>
+          </a:prstGeom>
+          <a:noFill/>
+        </p:spPr>
+        <p:txBody>
+          <a:bodyPr wrap="square">
+            <a:spAutoFit/>
+          </a:bodyPr>
+          <a:lstStyle/>
+          <a:p>
+            <a:pPr algn="ctr"/>
+            <a:r>
+              <a:rPr sz="2000" b="0" i="0">
+                <a:solidFill>
+                  <a:srgbClr val="828282"/>
                 </a:solidFill>
                 <a:latin typeface="Arial"/>
               </a:rPr>
@@ -5464,23 +5184,23 @@
         </p:nvSpPr>
         <p:spPr>
           <a:xfrm>
-            <a:off x="594360" y="2258568"/>
-            <a:ext cx="11002975" cy="685800"/>
-          </a:xfrm>
-          <a:prstGeom prst="rect">
-            <a:avLst/>
-          </a:prstGeom>
-          <a:noFill/>
-        </p:spPr>
-        <p:txBody>
-          <a:bodyPr wrap="square">
-            <a:spAutoFit/>
-          </a:bodyPr>
-          <a:lstStyle/>
-          <a:p>
-            <a:pPr algn="ctr"/>
-            <a:r>
-              <a:rPr sz="4400" b="1" i="0">
+            <a:off x="640080" y="2052828"/>
+            <a:ext cx="10911535" cy="731520"/>
+          </a:xfrm>
+          <a:prstGeom prst="rect">
+            <a:avLst/>
+          </a:prstGeom>
+          <a:noFill/>
+        </p:spPr>
+        <p:txBody>
+          <a:bodyPr wrap="square">
+            <a:spAutoFit/>
+          </a:bodyPr>
+          <a:lstStyle/>
+          <a:p>
+            <a:pPr algn="ctr"/>
+            <a:r>
+              <a:rPr sz="4800" b="1" i="0">
                 <a:solidFill>
                   <a:srgbClr val="FFFFFF"/>
                 </a:solidFill>
@@ -5499,99 +5219,29 @@
         </p:nvSpPr>
         <p:spPr>
           <a:xfrm>
-            <a:off x="594360" y="2980944"/>
-            <a:ext cx="11002975" cy="347472"/>
-          </a:xfrm>
-          <a:prstGeom prst="rect">
-            <a:avLst/>
-          </a:prstGeom>
-          <a:noFill/>
-        </p:spPr>
-        <p:txBody>
-          <a:bodyPr wrap="square">
-            <a:spAutoFit/>
-          </a:bodyPr>
-          <a:lstStyle/>
-          <a:p>
-            <a:pPr algn="ctr"/>
-            <a:r>
-              <a:rPr sz="2200" b="0" i="1">
-                <a:solidFill>
-                  <a:srgbClr val="8C8C8C"/>
-                </a:solidFill>
-                <a:latin typeface="Arial"/>
-              </a:rPr>
-              <a:t/>
-            </a:r>
-          </a:p>
-        </p:txBody>
-      </p:sp>
-      <p:sp>
-        <p:nvSpPr>
-          <p:cNvPr id="4" name="TextBox 3"/>
-          <p:cNvSpPr txBox="1"/>
-          <p:nvPr/>
-        </p:nvSpPr>
-        <p:spPr>
-          <a:xfrm>
-            <a:off x="594360" y="3529584"/>
-            <a:ext cx="11002975" cy="685800"/>
-          </a:xfrm>
-          <a:prstGeom prst="rect">
-            <a:avLst/>
-          </a:prstGeom>
-          <a:noFill/>
-        </p:spPr>
-        <p:txBody>
-          <a:bodyPr wrap="square">
-            <a:spAutoFit/>
-          </a:bodyPr>
-          <a:lstStyle/>
-          <a:p>
-            <a:pPr algn="ctr"/>
-            <a:r>
-              <a:rPr sz="4400" b="1" i="0">
+            <a:off x="640080" y="2985516"/>
+            <a:ext cx="10911535" cy="731520"/>
+          </a:xfrm>
+          <a:prstGeom prst="rect">
+            <a:avLst/>
+          </a:prstGeom>
+          <a:noFill/>
+        </p:spPr>
+        <p:txBody>
+          <a:bodyPr wrap="square">
+            <a:spAutoFit/>
+          </a:bodyPr>
+          <a:lstStyle/>
+          <a:p>
+            <a:pPr algn="ctr"/>
+            <a:r>
+              <a:rPr sz="4800" b="1" i="0">
                 <a:solidFill>
                   <a:srgbClr val="FFFFFF"/>
                 </a:solidFill>
                 <a:latin typeface="Arial"/>
               </a:rPr>
               <a:t>Gozo, paz, consolação?</a:t>
-            </a:r>
-          </a:p>
-        </p:txBody>
-      </p:sp>
-      <p:sp>
-        <p:nvSpPr>
-          <p:cNvPr id="5" name="TextBox 4"/>
-          <p:cNvSpPr txBox="1"/>
-          <p:nvPr/>
-        </p:nvSpPr>
-        <p:spPr>
-          <a:xfrm>
-            <a:off x="594360" y="4251960"/>
-            <a:ext cx="11002975" cy="347472"/>
-          </a:xfrm>
-          <a:prstGeom prst="rect">
-            <a:avLst/>
-          </a:prstGeom>
-          <a:noFill/>
-        </p:spPr>
-        <p:txBody>
-          <a:bodyPr wrap="square">
-            <a:spAutoFit/>
-          </a:bodyPr>
-          <a:lstStyle/>
-          <a:p>
-            <a:pPr algn="ctr"/>
-            <a:r>
-              <a:rPr sz="2200" b="0" i="1">
-                <a:solidFill>
-                  <a:srgbClr val="8C8C8C"/>
-                </a:solidFill>
-                <a:latin typeface="Arial"/>
-              </a:rPr>
-              <a:t/>
             </a:r>
           </a:p>
         </p:txBody>
@@ -5630,23 +5280,23 @@
         </p:nvSpPr>
         <p:spPr>
           <a:xfrm>
-            <a:off x="594360" y="2258568"/>
-            <a:ext cx="11002975" cy="685800"/>
-          </a:xfrm>
-          <a:prstGeom prst="rect">
-            <a:avLst/>
-          </a:prstGeom>
-          <a:noFill/>
-        </p:spPr>
-        <p:txBody>
-          <a:bodyPr wrap="square">
-            <a:spAutoFit/>
-          </a:bodyPr>
-          <a:lstStyle/>
-          <a:p>
-            <a:pPr algn="ctr"/>
-            <a:r>
-              <a:rPr sz="4400" b="1" i="0">
+            <a:off x="640080" y="2052828"/>
+            <a:ext cx="10911535" cy="731520"/>
+          </a:xfrm>
+          <a:prstGeom prst="rect">
+            <a:avLst/>
+          </a:prstGeom>
+          <a:noFill/>
+        </p:spPr>
+        <p:txBody>
+          <a:bodyPr wrap="square">
+            <a:spAutoFit/>
+          </a:bodyPr>
+          <a:lstStyle/>
+          <a:p>
+            <a:pPr algn="ctr"/>
+            <a:r>
+              <a:rPr sz="4800" b="1" i="0">
                 <a:solidFill>
                   <a:srgbClr val="FFFFFF"/>
                 </a:solidFill>
@@ -5665,99 +5315,29 @@
         </p:nvSpPr>
         <p:spPr>
           <a:xfrm>
-            <a:off x="594360" y="2980944"/>
-            <a:ext cx="11002975" cy="347472"/>
-          </a:xfrm>
-          <a:prstGeom prst="rect">
-            <a:avLst/>
-          </a:prstGeom>
-          <a:noFill/>
-        </p:spPr>
-        <p:txBody>
-          <a:bodyPr wrap="square">
-            <a:spAutoFit/>
-          </a:bodyPr>
-          <a:lstStyle/>
-          <a:p>
-            <a:pPr algn="ctr"/>
-            <a:r>
-              <a:rPr sz="2200" b="0" i="1">
-                <a:solidFill>
-                  <a:srgbClr val="8C8C8C"/>
-                </a:solidFill>
-                <a:latin typeface="Arial"/>
-              </a:rPr>
-              <a:t/>
-            </a:r>
-          </a:p>
-        </p:txBody>
-      </p:sp>
-      <p:sp>
-        <p:nvSpPr>
-          <p:cNvPr id="4" name="TextBox 3"/>
-          <p:cNvSpPr txBox="1"/>
-          <p:nvPr/>
-        </p:nvSpPr>
-        <p:spPr>
-          <a:xfrm>
-            <a:off x="594360" y="3529584"/>
-            <a:ext cx="11002975" cy="685800"/>
-          </a:xfrm>
-          <a:prstGeom prst="rect">
-            <a:avLst/>
-          </a:prstGeom>
-          <a:noFill/>
-        </p:spPr>
-        <p:txBody>
-          <a:bodyPr wrap="square">
-            <a:spAutoFit/>
-          </a:bodyPr>
-          <a:lstStyle/>
-          <a:p>
-            <a:pPr algn="ctr"/>
-            <a:r>
-              <a:rPr sz="4400" b="1" i="0">
+            <a:off x="640080" y="2985516"/>
+            <a:ext cx="10911535" cy="731520"/>
+          </a:xfrm>
+          <a:prstGeom prst="rect">
+            <a:avLst/>
+          </a:prstGeom>
+          <a:noFill/>
+        </p:spPr>
+        <p:txBody>
+          <a:bodyPr wrap="square">
+            <a:spAutoFit/>
+          </a:bodyPr>
+          <a:lstStyle/>
+          <a:p>
+            <a:pPr algn="ctr"/>
+            <a:r>
+              <a:rPr sz="4800" b="1" i="0">
                 <a:solidFill>
                   <a:srgbClr val="FFFFFF"/>
                 </a:solidFill>
                 <a:latin typeface="Arial"/>
               </a:rPr>
               <a:t>Tudo a Deus em oração.</a:t>
-            </a:r>
-          </a:p>
-        </p:txBody>
-      </p:sp>
-      <p:sp>
-        <p:nvSpPr>
-          <p:cNvPr id="5" name="TextBox 4"/>
-          <p:cNvSpPr txBox="1"/>
-          <p:nvPr/>
-        </p:nvSpPr>
-        <p:spPr>
-          <a:xfrm>
-            <a:off x="594360" y="4251960"/>
-            <a:ext cx="11002975" cy="347472"/>
-          </a:xfrm>
-          <a:prstGeom prst="rect">
-            <a:avLst/>
-          </a:prstGeom>
-          <a:noFill/>
-        </p:spPr>
-        <p:txBody>
-          <a:bodyPr wrap="square">
-            <a:spAutoFit/>
-          </a:bodyPr>
-          <a:lstStyle/>
-          <a:p>
-            <a:pPr algn="ctr"/>
-            <a:r>
-              <a:rPr sz="2200" b="0" i="1">
-                <a:solidFill>
-                  <a:srgbClr val="8C8C8C"/>
-                </a:solidFill>
-                <a:latin typeface="Arial"/>
-              </a:rPr>
-              <a:t/>
             </a:r>
           </a:p>
         </p:txBody>
@@ -5796,23 +5376,23 @@
         </p:nvSpPr>
         <p:spPr>
           <a:xfrm>
-            <a:off x="594360" y="1837944"/>
-            <a:ext cx="11002975" cy="685800"/>
-          </a:xfrm>
-          <a:prstGeom prst="rect">
-            <a:avLst/>
-          </a:prstGeom>
-          <a:noFill/>
-        </p:spPr>
-        <p:txBody>
-          <a:bodyPr wrap="square">
-            <a:spAutoFit/>
-          </a:bodyPr>
-          <a:lstStyle/>
-          <a:p>
-            <a:pPr algn="ctr"/>
-            <a:r>
-              <a:rPr sz="4400" b="1" i="0">
+            <a:off x="640080" y="1650492"/>
+            <a:ext cx="10911535" cy="731520"/>
+          </a:xfrm>
+          <a:prstGeom prst="rect">
+            <a:avLst/>
+          </a:prstGeom>
+          <a:noFill/>
+        </p:spPr>
+        <p:txBody>
+          <a:bodyPr wrap="square">
+            <a:spAutoFit/>
+          </a:bodyPr>
+          <a:lstStyle/>
+          <a:p>
+            <a:pPr algn="ctr"/>
+            <a:r>
+              <a:rPr sz="4800" b="1" i="0">
                 <a:solidFill>
                   <a:srgbClr val="FFFFFF"/>
                 </a:solidFill>
@@ -5831,8 +5411,8 @@
         </p:nvSpPr>
         <p:spPr>
           <a:xfrm>
-            <a:off x="594360" y="2560320"/>
-            <a:ext cx="11002975" cy="384048"/>
+            <a:off x="640080" y="2418588"/>
+            <a:ext cx="10911535" cy="365760"/>
           </a:xfrm>
           <a:prstGeom prst="rect">
             <a:avLst/>
@@ -5849,7 +5429,7 @@
             <a:r>
               <a:rPr sz="2400" b="0" i="1">
                 <a:solidFill>
-                  <a:srgbClr val="B4B4B4"/>
+                  <a:srgbClr val="AAAAAA"/>
                 </a:solidFill>
                 <a:latin typeface="Arial"/>
               </a:rPr>
@@ -5866,8 +5446,78 @@
         </p:nvSpPr>
         <p:spPr>
           <a:xfrm>
-            <a:off x="594360" y="2980944"/>
-            <a:ext cx="11002975" cy="347472"/>
+            <a:off x="640080" y="2985516"/>
+            <a:ext cx="10911535" cy="731520"/>
+          </a:xfrm>
+          <a:prstGeom prst="rect">
+            <a:avLst/>
+          </a:prstGeom>
+          <a:noFill/>
+        </p:spPr>
+        <p:txBody>
+          <a:bodyPr wrap="square">
+            <a:spAutoFit/>
+          </a:bodyPr>
+          <a:lstStyle/>
+          <a:p>
+            <a:pPr algn="ctr"/>
+            <a:r>
+              <a:rPr sz="4800" b="1" i="0">
+                <a:solidFill>
+                  <a:srgbClr val="FFFFFF"/>
+                </a:solidFill>
+                <a:latin typeface="Arial"/>
+              </a:rPr>
+              <a:t>罪とが憂いを      とり去りたもう</a:t>
+            </a:r>
+          </a:p>
+        </p:txBody>
+      </p:sp>
+      <p:sp>
+        <p:nvSpPr>
+          <p:cNvPr id="5" name="TextBox 4"/>
+          <p:cNvSpPr txBox="1"/>
+          <p:nvPr/>
+        </p:nvSpPr>
+        <p:spPr>
+          <a:xfrm>
+            <a:off x="640080" y="3753612"/>
+            <a:ext cx="10911535" cy="365760"/>
+          </a:xfrm>
+          <a:prstGeom prst="rect">
+            <a:avLst/>
+          </a:prstGeom>
+          <a:noFill/>
+        </p:spPr>
+        <p:txBody>
+          <a:bodyPr wrap="square">
+            <a:spAutoFit/>
+          </a:bodyPr>
+          <a:lstStyle/>
+          <a:p>
+            <a:pPr algn="ctr"/>
+            <a:r>
+              <a:rPr sz="2400" b="0" i="1">
+                <a:solidFill>
+                  <a:srgbClr val="AAAAAA"/>
+                </a:solidFill>
+                <a:latin typeface="Arial"/>
+              </a:rPr>
+              <a:t>Tsu-mi to ga urei-o   to-ri sarita mou</a:t>
+            </a:r>
+          </a:p>
+        </p:txBody>
+      </p:sp>
+      <p:sp>
+        <p:nvSpPr>
+          <p:cNvPr id="6" name="TextBox 5"/>
+          <p:cNvSpPr txBox="1"/>
+          <p:nvPr/>
+        </p:nvSpPr>
+        <p:spPr>
+          <a:xfrm>
+            <a:off x="640080" y="4530852"/>
+            <a:ext cx="10911535" cy="310896"/>
           </a:xfrm>
           <a:prstGeom prst="rect">
             <a:avLst/>
@@ -5884,7 +5534,7 @@
             <a:r>
               <a:rPr sz="2000" b="0" i="1">
                 <a:solidFill>
-                  <a:srgbClr val="8C8C8C"/>
+                  <a:srgbClr val="828282"/>
                 </a:solidFill>
                 <a:latin typeface="Arial"/>
               </a:rPr>
@@ -5895,84 +5545,14 @@
       </p:sp>
       <p:sp>
         <p:nvSpPr>
-          <p:cNvPr id="5" name="TextBox 4"/>
-          <p:cNvSpPr txBox="1"/>
-          <p:nvPr/>
-        </p:nvSpPr>
-        <p:spPr>
-          <a:xfrm>
-            <a:off x="594360" y="3529584"/>
-            <a:ext cx="11002975" cy="685800"/>
-          </a:xfrm>
-          <a:prstGeom prst="rect">
-            <a:avLst/>
-          </a:prstGeom>
-          <a:noFill/>
-        </p:spPr>
-        <p:txBody>
-          <a:bodyPr wrap="square">
-            <a:spAutoFit/>
-          </a:bodyPr>
-          <a:lstStyle/>
-          <a:p>
-            <a:pPr algn="ctr"/>
-            <a:r>
-              <a:rPr sz="4400" b="1" i="0">
-                <a:solidFill>
-                  <a:srgbClr val="FFFFFF"/>
-                </a:solidFill>
-                <a:latin typeface="Arial"/>
-              </a:rPr>
-              <a:t>罪とが憂いを      とり去りたもう</a:t>
-            </a:r>
-          </a:p>
-        </p:txBody>
-      </p:sp>
-      <p:sp>
-        <p:nvSpPr>
-          <p:cNvPr id="6" name="TextBox 5"/>
-          <p:cNvSpPr txBox="1"/>
-          <p:nvPr/>
-        </p:nvSpPr>
-        <p:spPr>
-          <a:xfrm>
-            <a:off x="594360" y="4251960"/>
-            <a:ext cx="11002975" cy="384048"/>
-          </a:xfrm>
-          <a:prstGeom prst="rect">
-            <a:avLst/>
-          </a:prstGeom>
-          <a:noFill/>
-        </p:spPr>
-        <p:txBody>
-          <a:bodyPr wrap="square">
-            <a:spAutoFit/>
-          </a:bodyPr>
-          <a:lstStyle/>
-          <a:p>
-            <a:pPr algn="ctr"/>
-            <a:r>
-              <a:rPr sz="2400" b="0" i="1">
-                <a:solidFill>
-                  <a:srgbClr val="B4B4B4"/>
-                </a:solidFill>
-                <a:latin typeface="Arial"/>
-              </a:rPr>
-              <a:t>Tsu-mi to ga urei-o   to-ri sarita mou</a:t>
-            </a:r>
-          </a:p>
-        </p:txBody>
-      </p:sp>
-      <p:sp>
-        <p:nvSpPr>
           <p:cNvPr id="7" name="TextBox 6"/>
           <p:cNvSpPr txBox="1"/>
           <p:nvPr/>
         </p:nvSpPr>
         <p:spPr>
           <a:xfrm>
-            <a:off x="594360" y="4672584"/>
-            <a:ext cx="11002975" cy="347472"/>
+            <a:off x="640080" y="4896612"/>
+            <a:ext cx="10911535" cy="310896"/>
           </a:xfrm>
           <a:prstGeom prst="rect">
             <a:avLst/>
@@ -5989,7 +5569,7 @@
             <a:r>
               <a:rPr sz="2000" b="0" i="1">
                 <a:solidFill>
-                  <a:srgbClr val="8C8C8C"/>
+                  <a:srgbClr val="828282"/>
                 </a:solidFill>
                 <a:latin typeface="Arial"/>
               </a:rPr>
@@ -6032,23 +5612,23 @@
         </p:nvSpPr>
         <p:spPr>
           <a:xfrm>
-            <a:off x="594360" y="1837944"/>
-            <a:ext cx="11002975" cy="685800"/>
-          </a:xfrm>
-          <a:prstGeom prst="rect">
-            <a:avLst/>
-          </a:prstGeom>
-          <a:noFill/>
-        </p:spPr>
-        <p:txBody>
-          <a:bodyPr wrap="square">
-            <a:spAutoFit/>
-          </a:bodyPr>
-          <a:lstStyle/>
-          <a:p>
-            <a:pPr algn="ctr"/>
-            <a:r>
-              <a:rPr sz="4400" b="1" i="0">
+            <a:off x="640080" y="1650492"/>
+            <a:ext cx="10911535" cy="731520"/>
+          </a:xfrm>
+          <a:prstGeom prst="rect">
+            <a:avLst/>
+          </a:prstGeom>
+          <a:noFill/>
+        </p:spPr>
+        <p:txBody>
+          <a:bodyPr wrap="square">
+            <a:spAutoFit/>
+          </a:bodyPr>
+          <a:lstStyle/>
+          <a:p>
+            <a:pPr algn="ctr"/>
+            <a:r>
+              <a:rPr sz="4800" b="1" i="0">
                 <a:solidFill>
                   <a:srgbClr val="FFFFFF"/>
                 </a:solidFill>
@@ -6067,8 +5647,8 @@
         </p:nvSpPr>
         <p:spPr>
           <a:xfrm>
-            <a:off x="594360" y="2560320"/>
-            <a:ext cx="11002975" cy="384048"/>
+            <a:off x="640080" y="2418588"/>
+            <a:ext cx="10911535" cy="365760"/>
           </a:xfrm>
           <a:prstGeom prst="rect">
             <a:avLst/>
@@ -6085,7 +5665,7 @@
             <a:r>
               <a:rPr sz="2400" b="0" i="1">
                 <a:solidFill>
-                  <a:srgbClr val="B4B4B4"/>
+                  <a:srgbClr val="AAAAAA"/>
                 </a:solidFill>
                 <a:latin typeface="Arial"/>
               </a:rPr>
@@ -6102,8 +5682,78 @@
         </p:nvSpPr>
         <p:spPr>
           <a:xfrm>
-            <a:off x="594360" y="2980944"/>
-            <a:ext cx="11002975" cy="347472"/>
+            <a:off x="640080" y="2985516"/>
+            <a:ext cx="10911535" cy="731520"/>
+          </a:xfrm>
+          <a:prstGeom prst="rect">
+            <a:avLst/>
+          </a:prstGeom>
+          <a:noFill/>
+        </p:spPr>
+        <p:txBody>
+          <a:bodyPr wrap="square">
+            <a:spAutoFit/>
+          </a:bodyPr>
+          <a:lstStyle/>
+          <a:p>
+            <a:pPr algn="ctr"/>
+            <a:r>
+              <a:rPr sz="4800" b="1" i="0">
+                <a:solidFill>
+                  <a:srgbClr val="FFFFFF"/>
+                </a:solidFill>
+                <a:latin typeface="Arial"/>
+              </a:rPr>
+              <a:t>などかは下ろさぬ    負える重荷を</a:t>
+            </a:r>
+          </a:p>
+        </p:txBody>
+      </p:sp>
+      <p:sp>
+        <p:nvSpPr>
+          <p:cNvPr id="5" name="TextBox 4"/>
+          <p:cNvSpPr txBox="1"/>
+          <p:nvPr/>
+        </p:nvSpPr>
+        <p:spPr>
+          <a:xfrm>
+            <a:off x="640080" y="3753612"/>
+            <a:ext cx="10911535" cy="365760"/>
+          </a:xfrm>
+          <a:prstGeom prst="rect">
+            <a:avLst/>
+          </a:prstGeom>
+          <a:noFill/>
+        </p:spPr>
+        <p:txBody>
+          <a:bodyPr wrap="square">
+            <a:spAutoFit/>
+          </a:bodyPr>
+          <a:lstStyle/>
+          <a:p>
+            <a:pPr algn="ctr"/>
+            <a:r>
+              <a:rPr sz="2400" b="0" i="1">
+                <a:solidFill>
+                  <a:srgbClr val="AAAAAA"/>
+                </a:solidFill>
+                <a:latin typeface="Arial"/>
+              </a:rPr>
+              <a:t>Na-do ka wa orosa-nu  o-eru omoni wo</a:t>
+            </a:r>
+          </a:p>
+        </p:txBody>
+      </p:sp>
+      <p:sp>
+        <p:nvSpPr>
+          <p:cNvPr id="6" name="TextBox 5"/>
+          <p:cNvSpPr txBox="1"/>
+          <p:nvPr/>
+        </p:nvSpPr>
+        <p:spPr>
+          <a:xfrm>
+            <a:off x="640080" y="4530852"/>
+            <a:ext cx="10911535" cy="310896"/>
           </a:xfrm>
           <a:prstGeom prst="rect">
             <a:avLst/>
@@ -6120,7 +5770,7 @@
             <a:r>
               <a:rPr sz="2000" b="0" i="1">
                 <a:solidFill>
-                  <a:srgbClr val="8C8C8C"/>
+                  <a:srgbClr val="828282"/>
                 </a:solidFill>
                 <a:latin typeface="Arial"/>
               </a:rPr>
@@ -6131,84 +5781,14 @@
       </p:sp>
       <p:sp>
         <p:nvSpPr>
-          <p:cNvPr id="5" name="TextBox 4"/>
-          <p:cNvSpPr txBox="1"/>
-          <p:nvPr/>
-        </p:nvSpPr>
-        <p:spPr>
-          <a:xfrm>
-            <a:off x="594360" y="3529584"/>
-            <a:ext cx="11002975" cy="685800"/>
-          </a:xfrm>
-          <a:prstGeom prst="rect">
-            <a:avLst/>
-          </a:prstGeom>
-          <a:noFill/>
-        </p:spPr>
-        <p:txBody>
-          <a:bodyPr wrap="square">
-            <a:spAutoFit/>
-          </a:bodyPr>
-          <a:lstStyle/>
-          <a:p>
-            <a:pPr algn="ctr"/>
-            <a:r>
-              <a:rPr sz="4400" b="1" i="0">
-                <a:solidFill>
-                  <a:srgbClr val="FFFFFF"/>
-                </a:solidFill>
-                <a:latin typeface="Arial"/>
-              </a:rPr>
-              <a:t>などかは下ろさぬ    負える重荷を</a:t>
-            </a:r>
-          </a:p>
-        </p:txBody>
-      </p:sp>
-      <p:sp>
-        <p:nvSpPr>
-          <p:cNvPr id="6" name="TextBox 5"/>
-          <p:cNvSpPr txBox="1"/>
-          <p:nvPr/>
-        </p:nvSpPr>
-        <p:spPr>
-          <a:xfrm>
-            <a:off x="594360" y="4251960"/>
-            <a:ext cx="11002975" cy="384048"/>
-          </a:xfrm>
-          <a:prstGeom prst="rect">
-            <a:avLst/>
-          </a:prstGeom>
-          <a:noFill/>
-        </p:spPr>
-        <p:txBody>
-          <a:bodyPr wrap="square">
-            <a:spAutoFit/>
-          </a:bodyPr>
-          <a:lstStyle/>
-          <a:p>
-            <a:pPr algn="ctr"/>
-            <a:r>
-              <a:rPr sz="2400" b="0" i="1">
-                <a:solidFill>
-                  <a:srgbClr val="B4B4B4"/>
-                </a:solidFill>
-                <a:latin typeface="Arial"/>
-              </a:rPr>
-              <a:t>Na-do ka wa orosa-nu  o-eru omoni wo</a:t>
-            </a:r>
-          </a:p>
-        </p:txBody>
-      </p:sp>
-      <p:sp>
-        <p:nvSpPr>
           <p:cNvPr id="7" name="TextBox 6"/>
           <p:cNvSpPr txBox="1"/>
           <p:nvPr/>
         </p:nvSpPr>
         <p:spPr>
           <a:xfrm>
-            <a:off x="594360" y="4672584"/>
-            <a:ext cx="11002975" cy="347472"/>
+            <a:off x="640080" y="4896612"/>
+            <a:ext cx="10911535" cy="310896"/>
           </a:xfrm>
           <a:prstGeom prst="rect">
             <a:avLst/>
@@ -6225,7 +5805,7 @@
             <a:r>
               <a:rPr sz="2000" b="0" i="1">
                 <a:solidFill>
-                  <a:srgbClr val="8C8C8C"/>
+                  <a:srgbClr val="828282"/>
                 </a:solidFill>
                 <a:latin typeface="Arial"/>
               </a:rPr>
@@ -6268,23 +5848,23 @@
         </p:nvSpPr>
         <p:spPr>
           <a:xfrm>
-            <a:off x="594360" y="2258568"/>
-            <a:ext cx="11002975" cy="685800"/>
-          </a:xfrm>
-          <a:prstGeom prst="rect">
-            <a:avLst/>
-          </a:prstGeom>
-          <a:noFill/>
-        </p:spPr>
-        <p:txBody>
-          <a:bodyPr wrap="square">
-            <a:spAutoFit/>
-          </a:bodyPr>
-          <a:lstStyle/>
-          <a:p>
-            <a:pPr algn="ctr"/>
-            <a:r>
-              <a:rPr sz="4400" b="1" i="0">
+            <a:off x="640080" y="2052828"/>
+            <a:ext cx="10911535" cy="731520"/>
+          </a:xfrm>
+          <a:prstGeom prst="rect">
+            <a:avLst/>
+          </a:prstGeom>
+          <a:noFill/>
+        </p:spPr>
+        <p:txBody>
+          <a:bodyPr wrap="square">
+            <a:spAutoFit/>
+          </a:bodyPr>
+          <a:lstStyle/>
+          <a:p>
+            <a:pPr algn="ctr"/>
+            <a:r>
+              <a:rPr sz="4800" b="1" i="0">
                 <a:solidFill>
                   <a:srgbClr val="FFFFFF"/>
                 </a:solidFill>
@@ -6303,29 +5883,29 @@
         </p:nvSpPr>
         <p:spPr>
           <a:xfrm>
-            <a:off x="594360" y="2980944"/>
-            <a:ext cx="11002975" cy="347472"/>
-          </a:xfrm>
-          <a:prstGeom prst="rect">
-            <a:avLst/>
-          </a:prstGeom>
-          <a:noFill/>
-        </p:spPr>
-        <p:txBody>
-          <a:bodyPr wrap="square">
-            <a:spAutoFit/>
-          </a:bodyPr>
-          <a:lstStyle/>
-          <a:p>
-            <a:pPr algn="ctr"/>
-            <a:r>
-              <a:rPr sz="2200" b="0" i="1">
-                <a:solidFill>
-                  <a:srgbClr val="8C8C8C"/>
-                </a:solidFill>
-                <a:latin typeface="Arial"/>
-              </a:rPr>
-              <a:t/>
+            <a:off x="640080" y="2985516"/>
+            <a:ext cx="10911535" cy="731520"/>
+          </a:xfrm>
+          <a:prstGeom prst="rect">
+            <a:avLst/>
+          </a:prstGeom>
+          <a:noFill/>
+        </p:spPr>
+        <p:txBody>
+          <a:bodyPr wrap="square">
+            <a:spAutoFit/>
+          </a:bodyPr>
+          <a:lstStyle/>
+          <a:p>
+            <a:pPr algn="ctr"/>
+            <a:r>
+              <a:rPr sz="4800" b="1" i="0">
+                <a:solidFill>
+                  <a:srgbClr val="FFFFFF"/>
+                </a:solidFill>
+                <a:latin typeface="Arial"/>
+              </a:rPr>
+              <a:t>De cuidados e temor?</a:t>
             </a:r>
           </a:p>
         </p:txBody>
@@ -6338,29 +5918,29 @@
         </p:nvSpPr>
         <p:spPr>
           <a:xfrm>
-            <a:off x="594360" y="3529584"/>
-            <a:ext cx="11002975" cy="685800"/>
-          </a:xfrm>
-          <a:prstGeom prst="rect">
-            <a:avLst/>
-          </a:prstGeom>
-          <a:noFill/>
-        </p:spPr>
-        <p:txBody>
-          <a:bodyPr wrap="square">
-            <a:spAutoFit/>
-          </a:bodyPr>
-          <a:lstStyle/>
-          <a:p>
-            <a:pPr algn="ctr"/>
-            <a:r>
-              <a:rPr sz="4400" b="1" i="0">
-                <a:solidFill>
-                  <a:srgbClr val="FFFFFF"/>
-                </a:solidFill>
-                <a:latin typeface="Arial"/>
-              </a:rPr>
-              <a:t>De cuidados e temor?</a:t>
+            <a:off x="640080" y="4128516"/>
+            <a:ext cx="10911535" cy="310896"/>
+          </a:xfrm>
+          <a:prstGeom prst="rect">
+            <a:avLst/>
+          </a:prstGeom>
+          <a:noFill/>
+        </p:spPr>
+        <p:txBody>
+          <a:bodyPr wrap="square">
+            <a:spAutoFit/>
+          </a:bodyPr>
+          <a:lstStyle/>
+          <a:p>
+            <a:pPr algn="ctr"/>
+            <a:r>
+              <a:rPr sz="2000" b="0" i="0">
+                <a:solidFill>
+                  <a:srgbClr val="828282"/>
+                </a:solidFill>
+                <a:latin typeface="Arial"/>
+              </a:rPr>
+              <a:t>いつくしみふかき友なるイエスは</a:t>
             </a:r>
           </a:p>
         </p:txBody>
@@ -6373,29 +5953,29 @@
         </p:nvSpPr>
         <p:spPr>
           <a:xfrm>
-            <a:off x="594360" y="4251960"/>
-            <a:ext cx="11002975" cy="347472"/>
-          </a:xfrm>
-          <a:prstGeom prst="rect">
-            <a:avLst/>
-          </a:prstGeom>
-          <a:noFill/>
-        </p:spPr>
-        <p:txBody>
-          <a:bodyPr wrap="square">
-            <a:spAutoFit/>
-          </a:bodyPr>
-          <a:lstStyle/>
-          <a:p>
-            <a:pPr algn="ctr"/>
-            <a:r>
-              <a:rPr sz="2200" b="0" i="1">
-                <a:solidFill>
-                  <a:srgbClr val="8C8C8C"/>
-                </a:solidFill>
-                <a:latin typeface="Arial"/>
-              </a:rPr>
-              <a:t/>
+            <a:off x="640080" y="4494276"/>
+            <a:ext cx="10911535" cy="310896"/>
+          </a:xfrm>
+          <a:prstGeom prst="rect">
+            <a:avLst/>
+          </a:prstGeom>
+          <a:noFill/>
+        </p:spPr>
+        <p:txBody>
+          <a:bodyPr wrap="square">
+            <a:spAutoFit/>
+          </a:bodyPr>
+          <a:lstStyle/>
+          <a:p>
+            <a:pPr algn="ctr"/>
+            <a:r>
+              <a:rPr sz="2000" b="0" i="0">
+                <a:solidFill>
+                  <a:srgbClr val="828282"/>
+                </a:solidFill>
+                <a:latin typeface="Arial"/>
+              </a:rPr>
+              <a:t>われらの弱きを  　知りて憐れむ</a:t>
             </a:r>
           </a:p>
         </p:txBody>
@@ -6434,23 +6014,23 @@
         </p:nvSpPr>
         <p:spPr>
           <a:xfrm>
-            <a:off x="594360" y="2258568"/>
-            <a:ext cx="11002975" cy="685800"/>
-          </a:xfrm>
-          <a:prstGeom prst="rect">
-            <a:avLst/>
-          </a:prstGeom>
-          <a:noFill/>
-        </p:spPr>
-        <p:txBody>
-          <a:bodyPr wrap="square">
-            <a:spAutoFit/>
-          </a:bodyPr>
-          <a:lstStyle/>
-          <a:p>
-            <a:pPr algn="ctr"/>
-            <a:r>
-              <a:rPr sz="4400" b="1" i="0">
+            <a:off x="640080" y="2052828"/>
+            <a:ext cx="10911535" cy="731520"/>
+          </a:xfrm>
+          <a:prstGeom prst="rect">
+            <a:avLst/>
+          </a:prstGeom>
+          <a:noFill/>
+        </p:spPr>
+        <p:txBody>
+          <a:bodyPr wrap="square">
+            <a:spAutoFit/>
+          </a:bodyPr>
+          <a:lstStyle/>
+          <a:p>
+            <a:pPr algn="ctr"/>
+            <a:r>
+              <a:rPr sz="4800" b="1" i="0">
                 <a:solidFill>
                   <a:srgbClr val="FFFFFF"/>
                 </a:solidFill>
@@ -6469,29 +6049,29 @@
         </p:nvSpPr>
         <p:spPr>
           <a:xfrm>
-            <a:off x="594360" y="2980944"/>
-            <a:ext cx="11002975" cy="347472"/>
-          </a:xfrm>
-          <a:prstGeom prst="rect">
-            <a:avLst/>
-          </a:prstGeom>
-          <a:noFill/>
-        </p:spPr>
-        <p:txBody>
-          <a:bodyPr wrap="square">
-            <a:spAutoFit/>
-          </a:bodyPr>
-          <a:lstStyle/>
-          <a:p>
-            <a:pPr algn="ctr"/>
-            <a:r>
-              <a:rPr sz="2200" b="0" i="1">
-                <a:solidFill>
-                  <a:srgbClr val="8C8C8C"/>
-                </a:solidFill>
-                <a:latin typeface="Arial"/>
-              </a:rPr>
-              <a:t/>
+            <a:off x="640080" y="2985516"/>
+            <a:ext cx="10911535" cy="731520"/>
+          </a:xfrm>
+          <a:prstGeom prst="rect">
+            <a:avLst/>
+          </a:prstGeom>
+          <a:noFill/>
+        </p:spPr>
+        <p:txBody>
+          <a:bodyPr wrap="square">
+            <a:spAutoFit/>
+          </a:bodyPr>
+          <a:lstStyle/>
+          <a:p>
+            <a:pPr algn="ctr"/>
+            <a:r>
+              <a:rPr sz="4800" b="1" i="0">
+                <a:solidFill>
+                  <a:srgbClr val="FFFFFF"/>
+                </a:solidFill>
+                <a:latin typeface="Arial"/>
+              </a:rPr>
+              <a:t>Vai com fé teu mal expor!</a:t>
             </a:r>
           </a:p>
         </p:txBody>
@@ -6504,29 +6084,29 @@
         </p:nvSpPr>
         <p:spPr>
           <a:xfrm>
-            <a:off x="594360" y="3529584"/>
-            <a:ext cx="11002975" cy="685800"/>
-          </a:xfrm>
-          <a:prstGeom prst="rect">
-            <a:avLst/>
-          </a:prstGeom>
-          <a:noFill/>
-        </p:spPr>
-        <p:txBody>
-          <a:bodyPr wrap="square">
-            <a:spAutoFit/>
-          </a:bodyPr>
-          <a:lstStyle/>
-          <a:p>
-            <a:pPr algn="ctr"/>
-            <a:r>
-              <a:rPr sz="4400" b="1" i="0">
-                <a:solidFill>
-                  <a:srgbClr val="FFFFFF"/>
-                </a:solidFill>
-                <a:latin typeface="Arial"/>
-              </a:rPr>
-              <a:t>Vai com fé teu mal expor!</a:t>
+            <a:off x="640080" y="4128516"/>
+            <a:ext cx="10911535" cy="310896"/>
+          </a:xfrm>
+          <a:prstGeom prst="rect">
+            <a:avLst/>
+          </a:prstGeom>
+          <a:noFill/>
+        </p:spPr>
+        <p:txBody>
+          <a:bodyPr wrap="square">
+            <a:spAutoFit/>
+          </a:bodyPr>
+          <a:lstStyle/>
+          <a:p>
+            <a:pPr algn="ctr"/>
+            <a:r>
+              <a:rPr sz="2000" b="0" i="0">
+                <a:solidFill>
+                  <a:srgbClr val="828282"/>
+                </a:solidFill>
+                <a:latin typeface="Arial"/>
+              </a:rPr>
+              <a:t>悩みかなしみに　沈めるときも</a:t>
             </a:r>
           </a:p>
         </p:txBody>
@@ -6539,29 +6119,29 @@
         </p:nvSpPr>
         <p:spPr>
           <a:xfrm>
-            <a:off x="594360" y="4251960"/>
-            <a:ext cx="11002975" cy="347472"/>
-          </a:xfrm>
-          <a:prstGeom prst="rect">
-            <a:avLst/>
-          </a:prstGeom>
-          <a:noFill/>
-        </p:spPr>
-        <p:txBody>
-          <a:bodyPr wrap="square">
-            <a:spAutoFit/>
-          </a:bodyPr>
-          <a:lstStyle/>
-          <a:p>
-            <a:pPr algn="ctr"/>
-            <a:r>
-              <a:rPr sz="2200" b="0" i="1">
-                <a:solidFill>
-                  <a:srgbClr val="8C8C8C"/>
-                </a:solidFill>
-                <a:latin typeface="Arial"/>
-              </a:rPr>
-              <a:t/>
+            <a:off x="640080" y="4494276"/>
+            <a:ext cx="10911535" cy="310896"/>
+          </a:xfrm>
+          <a:prstGeom prst="rect">
+            <a:avLst/>
+          </a:prstGeom>
+          <a:noFill/>
+        </p:spPr>
+        <p:txBody>
+          <a:bodyPr wrap="square">
+            <a:spAutoFit/>
+          </a:bodyPr>
+          <a:lstStyle/>
+          <a:p>
+            <a:pPr algn="ctr"/>
+            <a:r>
+              <a:rPr sz="2000" b="0" i="0">
+                <a:solidFill>
+                  <a:srgbClr val="828282"/>
+                </a:solidFill>
+                <a:latin typeface="Arial"/>
+              </a:rPr>
+              <a:t>祈りにこたえて なぐさめたまわん</a:t>
             </a:r>
           </a:p>
         </p:txBody>
@@ -6600,23 +6180,23 @@
         </p:nvSpPr>
         <p:spPr>
           <a:xfrm>
-            <a:off x="594360" y="2258568"/>
-            <a:ext cx="11002975" cy="685800"/>
-          </a:xfrm>
-          <a:prstGeom prst="rect">
-            <a:avLst/>
-          </a:prstGeom>
-          <a:noFill/>
-        </p:spPr>
-        <p:txBody>
-          <a:bodyPr wrap="square">
-            <a:spAutoFit/>
-          </a:bodyPr>
-          <a:lstStyle/>
-          <a:p>
-            <a:pPr algn="ctr"/>
-            <a:r>
-              <a:rPr sz="4400" b="1" i="0">
+            <a:off x="640080" y="2052828"/>
+            <a:ext cx="10911535" cy="731520"/>
+          </a:xfrm>
+          <a:prstGeom prst="rect">
+            <a:avLst/>
+          </a:prstGeom>
+          <a:noFill/>
+        </p:spPr>
+        <p:txBody>
+          <a:bodyPr wrap="square">
+            <a:spAutoFit/>
+          </a:bodyPr>
+          <a:lstStyle/>
+          <a:p>
+            <a:pPr algn="ctr"/>
+            <a:r>
+              <a:rPr sz="4800" b="1" i="0">
                 <a:solidFill>
                   <a:srgbClr val="FFFFFF"/>
                 </a:solidFill>
@@ -6635,99 +6215,29 @@
         </p:nvSpPr>
         <p:spPr>
           <a:xfrm>
-            <a:off x="594360" y="2980944"/>
-            <a:ext cx="11002975" cy="347472"/>
-          </a:xfrm>
-          <a:prstGeom prst="rect">
-            <a:avLst/>
-          </a:prstGeom>
-          <a:noFill/>
-        </p:spPr>
-        <p:txBody>
-          <a:bodyPr wrap="square">
-            <a:spAutoFit/>
-          </a:bodyPr>
-          <a:lstStyle/>
-          <a:p>
-            <a:pPr algn="ctr"/>
-            <a:r>
-              <a:rPr sz="2200" b="0" i="1">
-                <a:solidFill>
-                  <a:srgbClr val="8C8C8C"/>
-                </a:solidFill>
-                <a:latin typeface="Arial"/>
-              </a:rPr>
-              <a:t/>
-            </a:r>
-          </a:p>
-        </p:txBody>
-      </p:sp>
-      <p:sp>
-        <p:nvSpPr>
-          <p:cNvPr id="4" name="TextBox 3"/>
-          <p:cNvSpPr txBox="1"/>
-          <p:nvPr/>
-        </p:nvSpPr>
-        <p:spPr>
-          <a:xfrm>
-            <a:off x="594360" y="3529584"/>
-            <a:ext cx="11002975" cy="685800"/>
-          </a:xfrm>
-          <a:prstGeom prst="rect">
-            <a:avLst/>
-          </a:prstGeom>
-          <a:noFill/>
-        </p:spPr>
-        <p:txBody>
-          <a:bodyPr wrap="square">
-            <a:spAutoFit/>
-          </a:bodyPr>
-          <a:lstStyle/>
-          <a:p>
-            <a:pPr algn="ctr"/>
-            <a:r>
-              <a:rPr sz="4400" b="1" i="0">
+            <a:off x="640080" y="2985516"/>
+            <a:ext cx="10911535" cy="731520"/>
+          </a:xfrm>
+          <a:prstGeom prst="rect">
+            <a:avLst/>
+          </a:prstGeom>
+          <a:noFill/>
+        </p:spPr>
+        <p:txBody>
+          <a:bodyPr wrap="square">
+            <a:spAutoFit/>
+          </a:bodyPr>
+          <a:lstStyle/>
+          <a:p>
+            <a:pPr algn="ctr"/>
+            <a:r>
+              <a:rPr sz="4800" b="1" i="0">
                 <a:solidFill>
                   <a:srgbClr val="FFFFFF"/>
                 </a:solidFill>
                 <a:latin typeface="Arial"/>
               </a:rPr>
               <a:t>Conta-Lhe isso em oração,</a:t>
-            </a:r>
-          </a:p>
-        </p:txBody>
-      </p:sp>
-      <p:sp>
-        <p:nvSpPr>
-          <p:cNvPr id="5" name="TextBox 4"/>
-          <p:cNvSpPr txBox="1"/>
-          <p:nvPr/>
-        </p:nvSpPr>
-        <p:spPr>
-          <a:xfrm>
-            <a:off x="594360" y="4251960"/>
-            <a:ext cx="11002975" cy="347472"/>
-          </a:xfrm>
-          <a:prstGeom prst="rect">
-            <a:avLst/>
-          </a:prstGeom>
-          <a:noFill/>
-        </p:spPr>
-        <p:txBody>
-          <a:bodyPr wrap="square">
-            <a:spAutoFit/>
-          </a:bodyPr>
-          <a:lstStyle/>
-          <a:p>
-            <a:pPr algn="ctr"/>
-            <a:r>
-              <a:rPr sz="2200" b="0" i="1">
-                <a:solidFill>
-                  <a:srgbClr val="8C8C8C"/>
-                </a:solidFill>
-                <a:latin typeface="Arial"/>
-              </a:rPr>
-              <a:t/>
             </a:r>
           </a:p>
         </p:txBody>

--- a/output_pptx/What_A_Friend_We_Have_In_Jesus.pptx
+++ b/output_pptx/What_A_Friend_We_Have_In_Jesus.pptx
@@ -3350,6 +3350,76 @@
           </a:p>
         </p:txBody>
       </p:sp>
+      <p:sp>
+        <p:nvSpPr>
+          <p:cNvPr id="4" name="TextBox 3"/>
+          <p:cNvSpPr txBox="1"/>
+          <p:nvPr/>
+        </p:nvSpPr>
+        <p:spPr>
+          <a:xfrm>
+            <a:off x="640080" y="4128516"/>
+            <a:ext cx="10911535" cy="310896"/>
+          </a:xfrm>
+          <a:prstGeom prst="rect">
+            <a:avLst/>
+          </a:prstGeom>
+          <a:noFill/>
+        </p:spPr>
+        <p:txBody>
+          <a:bodyPr wrap="square">
+            <a:spAutoFit/>
+          </a:bodyPr>
+          <a:lstStyle/>
+          <a:p>
+            <a:pPr algn="ctr"/>
+            <a:r>
+              <a:rPr sz="2000" b="0" i="0">
+                <a:solidFill>
+                  <a:srgbClr val="828282"/>
+                </a:solidFill>
+                <a:latin typeface="Arial"/>
+              </a:rPr>
+              <a:t>そして神の優しい愛で</a:t>
+            </a:r>
+          </a:p>
+        </p:txBody>
+      </p:sp>
+      <p:sp>
+        <p:nvSpPr>
+          <p:cNvPr id="5" name="TextBox 4"/>
+          <p:cNvSpPr txBox="1"/>
+          <p:nvPr/>
+        </p:nvSpPr>
+        <p:spPr>
+          <a:xfrm>
+            <a:off x="640080" y="4494276"/>
+            <a:ext cx="10911535" cy="310896"/>
+          </a:xfrm>
+          <a:prstGeom prst="rect">
+            <a:avLst/>
+          </a:prstGeom>
+          <a:noFill/>
+        </p:spPr>
+        <p:txBody>
+          <a:bodyPr wrap="square">
+            <a:spAutoFit/>
+          </a:bodyPr>
+          <a:lstStyle/>
+          <a:p>
+            <a:pPr algn="ctr"/>
+            <a:r>
+              <a:rPr sz="2000" b="0" i="0">
+                <a:solidFill>
+                  <a:srgbClr val="828282"/>
+                </a:solidFill>
+                <a:latin typeface="Arial"/>
+              </a:rPr>
+              <a:t>心に平安を得るでしょう</a:t>
+            </a:r>
+          </a:p>
+        </p:txBody>
+      </p:sp>
     </p:spTree>
   </p:cSld>
   <p:clrMapOvr>
@@ -4250,6 +4320,76 @@
           </a:p>
         </p:txBody>
       </p:sp>
+      <p:sp>
+        <p:nvSpPr>
+          <p:cNvPr id="4" name="TextBox 3"/>
+          <p:cNvSpPr txBox="1"/>
+          <p:nvPr/>
+        </p:nvSpPr>
+        <p:spPr>
+          <a:xfrm>
+            <a:off x="640080" y="4128516"/>
+            <a:ext cx="10911535" cy="310896"/>
+          </a:xfrm>
+          <a:prstGeom prst="rect">
+            <a:avLst/>
+          </a:prstGeom>
+          <a:noFill/>
+        </p:spPr>
+        <p:txBody>
+          <a:bodyPr wrap="square">
+            <a:spAutoFit/>
+          </a:bodyPr>
+          <a:lstStyle/>
+          <a:p>
+            <a:pPr algn="ctr"/>
+            <a:r>
+              <a:rPr sz="2000" b="0" i="0">
+                <a:solidFill>
+                  <a:srgbClr val="828282"/>
+                </a:solidFill>
+                <a:latin typeface="Arial"/>
+              </a:rPr>
+              <a:t>神は純潔な血を流し</a:t>
+            </a:r>
+          </a:p>
+        </p:txBody>
+      </p:sp>
+      <p:sp>
+        <p:nvSpPr>
+          <p:cNvPr id="5" name="TextBox 4"/>
+          <p:cNvSpPr txBox="1"/>
+          <p:nvPr/>
+        </p:nvSpPr>
+        <p:spPr>
+          <a:xfrm>
+            <a:off x="640080" y="4494276"/>
+            <a:ext cx="10911535" cy="310896"/>
+          </a:xfrm>
+          <a:prstGeom prst="rect">
+            <a:avLst/>
+          </a:prstGeom>
+          <a:noFill/>
+        </p:spPr>
+        <p:txBody>
+          <a:bodyPr wrap="square">
+            <a:spAutoFit/>
+          </a:bodyPr>
+          <a:lstStyle/>
+          <a:p>
+            <a:pPr algn="ctr"/>
+            <a:r>
+              <a:rPr sz="2000" b="0" i="0">
+                <a:solidFill>
+                  <a:srgbClr val="828282"/>
+                </a:solidFill>
+                <a:latin typeface="Arial"/>
+              </a:rPr>
+              <a:t>私たちの汚れを洗い流すために</a:t>
+            </a:r>
+          </a:p>
+        </p:txBody>
+      </p:sp>
     </p:spTree>
   </p:cSld>
   <p:clrMapOvr>
@@ -4346,6 +4486,76 @@
           </a:p>
         </p:txBody>
       </p:sp>
+      <p:sp>
+        <p:nvSpPr>
+          <p:cNvPr id="4" name="TextBox 3"/>
+          <p:cNvSpPr txBox="1"/>
+          <p:nvPr/>
+        </p:nvSpPr>
+        <p:spPr>
+          <a:xfrm>
+            <a:off x="640080" y="4128516"/>
+            <a:ext cx="10911535" cy="310896"/>
+          </a:xfrm>
+          <a:prstGeom prst="rect">
+            <a:avLst/>
+          </a:prstGeom>
+          <a:noFill/>
+        </p:spPr>
+        <p:txBody>
+          <a:bodyPr wrap="square">
+            <a:spAutoFit/>
+          </a:bodyPr>
+          <a:lstStyle/>
+          <a:p>
+            <a:pPr algn="ctr"/>
+            <a:r>
+              <a:rPr sz="2000" b="0" i="0">
+                <a:solidFill>
+                  <a:srgbClr val="828282"/>
+                </a:solidFill>
+                <a:latin typeface="Arial"/>
+              </a:rPr>
+              <a:t>人生と将来の喜びを</a:t>
+            </a:r>
+          </a:p>
+        </p:txBody>
+      </p:sp>
+      <p:sp>
+        <p:nvSpPr>
+          <p:cNvPr id="5" name="TextBox 4"/>
+          <p:cNvSpPr txBox="1"/>
+          <p:nvPr/>
+        </p:nvSpPr>
+        <p:spPr>
+          <a:xfrm>
+            <a:off x="640080" y="4494276"/>
+            <a:ext cx="10911535" cy="310896"/>
+          </a:xfrm>
+          <a:prstGeom prst="rect">
+            <a:avLst/>
+          </a:prstGeom>
+          <a:noFill/>
+        </p:spPr>
+        <p:txBody>
+          <a:bodyPr wrap="square">
+            <a:spAutoFit/>
+          </a:bodyPr>
+          <a:lstStyle/>
+          <a:p>
+            <a:pPr algn="ctr"/>
+            <a:r>
+              <a:rPr sz="2000" b="0" i="0">
+                <a:solidFill>
+                  <a:srgbClr val="828282"/>
+                </a:solidFill>
+                <a:latin typeface="Arial"/>
+              </a:rPr>
+              <a:t>キリストの中で得ることができます</a:t>
+            </a:r>
+          </a:p>
+        </p:txBody>
+      </p:sp>
     </p:spTree>
   </p:cSld>
   <p:clrMapOvr>
@@ -4984,6 +5194,76 @@
           </a:p>
         </p:txBody>
       </p:sp>
+      <p:sp>
+        <p:nvSpPr>
+          <p:cNvPr id="6" name="TextBox 5"/>
+          <p:cNvSpPr txBox="1"/>
+          <p:nvPr/>
+        </p:nvSpPr>
+        <p:spPr>
+          <a:xfrm>
+            <a:off x="640080" y="4530852"/>
+            <a:ext cx="10911535" cy="310896"/>
+          </a:xfrm>
+          <a:prstGeom prst="rect">
+            <a:avLst/>
+          </a:prstGeom>
+          <a:noFill/>
+        </p:spPr>
+        <p:txBody>
+          <a:bodyPr wrap="square">
+            <a:spAutoFit/>
+          </a:bodyPr>
+          <a:lstStyle/>
+          <a:p>
+            <a:pPr algn="ctr"/>
+            <a:r>
+              <a:rPr sz="2000" b="0" i="1">
+                <a:solidFill>
+                  <a:srgbClr val="828282"/>
+                </a:solidFill>
+                <a:latin typeface="Arial"/>
+              </a:rPr>
+              <a:t>Meu Senhor, meu companheiro / Jesus, entrego tudo a Ti</a:t>
+            </a:r>
+          </a:p>
+        </p:txBody>
+      </p:sp>
+      <p:sp>
+        <p:nvSpPr>
+          <p:cNvPr id="7" name="TextBox 6"/>
+          <p:cNvSpPr txBox="1"/>
+          <p:nvPr/>
+        </p:nvSpPr>
+        <p:spPr>
+          <a:xfrm>
+            <a:off x="640080" y="4896612"/>
+            <a:ext cx="10911535" cy="310896"/>
+          </a:xfrm>
+          <a:prstGeom prst="rect">
+            <a:avLst/>
+          </a:prstGeom>
+          <a:noFill/>
+        </p:spPr>
+        <p:txBody>
+          <a:bodyPr wrap="square">
+            <a:spAutoFit/>
+          </a:bodyPr>
+          <a:lstStyle/>
+          <a:p>
+            <a:pPr algn="ctr"/>
+            <a:r>
+              <a:rPr sz="2000" b="0" i="1">
+                <a:solidFill>
+                  <a:srgbClr val="828282"/>
+                </a:solidFill>
+                <a:latin typeface="Arial"/>
+              </a:rPr>
+              <a:t>Meu Salvador, servo e rei / Entrego tudo a Ti</a:t>
+            </a:r>
+          </a:p>
+        </p:txBody>
+      </p:sp>
     </p:spTree>
   </p:cSld>
   <p:clrMapOvr>
@@ -5246,6 +5526,76 @@
           </a:p>
         </p:txBody>
       </p:sp>
+      <p:sp>
+        <p:nvSpPr>
+          <p:cNvPr id="4" name="TextBox 3"/>
+          <p:cNvSpPr txBox="1"/>
+          <p:nvPr/>
+        </p:nvSpPr>
+        <p:spPr>
+          <a:xfrm>
+            <a:off x="640080" y="4128516"/>
+            <a:ext cx="10911535" cy="310896"/>
+          </a:xfrm>
+          <a:prstGeom prst="rect">
+            <a:avLst/>
+          </a:prstGeom>
+          <a:noFill/>
+        </p:spPr>
+        <p:txBody>
+          <a:bodyPr wrap="square">
+            <a:spAutoFit/>
+          </a:bodyPr>
+          <a:lstStyle/>
+          <a:p>
+            <a:pPr algn="ctr"/>
+            <a:r>
+              <a:rPr sz="2000" b="0" i="0">
+                <a:solidFill>
+                  <a:srgbClr val="828282"/>
+                </a:solidFill>
+                <a:latin typeface="Arial"/>
+              </a:rPr>
+              <a:t>傷ついた心に欠けているのは</a:t>
+            </a:r>
+          </a:p>
+        </p:txBody>
+      </p:sp>
+      <p:sp>
+        <p:nvSpPr>
+          <p:cNvPr id="5" name="TextBox 4"/>
+          <p:cNvSpPr txBox="1"/>
+          <p:nvPr/>
+        </p:nvSpPr>
+        <p:spPr>
+          <a:xfrm>
+            <a:off x="640080" y="4494276"/>
+            <a:ext cx="10911535" cy="310896"/>
+          </a:xfrm>
+          <a:prstGeom prst="rect">
+            <a:avLst/>
+          </a:prstGeom>
+          <a:noFill/>
+        </p:spPr>
+        <p:txBody>
+          <a:bodyPr wrap="square">
+            <a:spAutoFit/>
+          </a:bodyPr>
+          <a:lstStyle/>
+          <a:p>
+            <a:pPr algn="ctr"/>
+            <a:r>
+              <a:rPr sz="2000" b="0" i="0">
+                <a:solidFill>
+                  <a:srgbClr val="828282"/>
+                </a:solidFill>
+                <a:latin typeface="Arial"/>
+              </a:rPr>
+              <a:t>喜びと平安と慰めですか？</a:t>
+            </a:r>
+          </a:p>
+        </p:txBody>
+      </p:sp>
     </p:spTree>
   </p:cSld>
   <p:clrMapOvr>
@@ -5342,6 +5692,76 @@
           </a:p>
         </p:txBody>
       </p:sp>
+      <p:sp>
+        <p:nvSpPr>
+          <p:cNvPr id="4" name="TextBox 3"/>
+          <p:cNvSpPr txBox="1"/>
+          <p:nvPr/>
+        </p:nvSpPr>
+        <p:spPr>
+          <a:xfrm>
+            <a:off x="640080" y="4128516"/>
+            <a:ext cx="10911535" cy="310896"/>
+          </a:xfrm>
+          <a:prstGeom prst="rect">
+            <a:avLst/>
+          </a:prstGeom>
+          <a:noFill/>
+        </p:spPr>
+        <p:txBody>
+          <a:bodyPr wrap="square">
+            <a:spAutoFit/>
+          </a:bodyPr>
+          <a:lstStyle/>
+          <a:p>
+            <a:pPr algn="ctr"/>
+            <a:r>
+              <a:rPr sz="2000" b="0" i="0">
+                <a:solidFill>
+                  <a:srgbClr val="828282"/>
+                </a:solidFill>
+                <a:latin typeface="Arial"/>
+              </a:rPr>
+              <a:t>それは私たちが</a:t>
+            </a:r>
+          </a:p>
+        </p:txBody>
+      </p:sp>
+      <p:sp>
+        <p:nvSpPr>
+          <p:cNvPr id="5" name="TextBox 4"/>
+          <p:cNvSpPr txBox="1"/>
+          <p:nvPr/>
+        </p:nvSpPr>
+        <p:spPr>
+          <a:xfrm>
+            <a:off x="640080" y="4494276"/>
+            <a:ext cx="10911535" cy="310896"/>
+          </a:xfrm>
+          <a:prstGeom prst="rect">
+            <a:avLst/>
+          </a:prstGeom>
+          <a:noFill/>
+        </p:spPr>
+        <p:txBody>
+          <a:bodyPr wrap="square">
+            <a:spAutoFit/>
+          </a:bodyPr>
+          <a:lstStyle/>
+          <a:p>
+            <a:pPr algn="ctr"/>
+            <a:r>
+              <a:rPr sz="2000" b="0" i="0">
+                <a:solidFill>
+                  <a:srgbClr val="828282"/>
+                </a:solidFill>
+                <a:latin typeface="Arial"/>
+              </a:rPr>
+              <a:t>すべてを祈りで神に委ねないからです</a:t>
+            </a:r>
+          </a:p>
+        </p:txBody>
+      </p:sp>
     </p:spTree>
   </p:cSld>
   <p:clrMapOvr>
@@ -6238,6 +6658,76 @@
                 <a:latin typeface="Arial"/>
               </a:rPr>
               <a:t>Conta-Lhe isso em oração,</a:t>
+            </a:r>
+          </a:p>
+        </p:txBody>
+      </p:sp>
+      <p:sp>
+        <p:nvSpPr>
+          <p:cNvPr id="4" name="TextBox 3"/>
+          <p:cNvSpPr txBox="1"/>
+          <p:nvPr/>
+        </p:nvSpPr>
+        <p:spPr>
+          <a:xfrm>
+            <a:off x="640080" y="4128516"/>
+            <a:ext cx="10911535" cy="310896"/>
+          </a:xfrm>
+          <a:prstGeom prst="rect">
+            <a:avLst/>
+          </a:prstGeom>
+          <a:noFill/>
+        </p:spPr>
+        <p:txBody>
+          <a:bodyPr wrap="square">
+            <a:spAutoFit/>
+          </a:bodyPr>
+          <a:lstStyle/>
+          <a:p>
+            <a:pPr algn="ctr"/>
+            <a:r>
+              <a:rPr sz="2000" b="0" i="0">
+                <a:solidFill>
+                  <a:srgbClr val="828282"/>
+                </a:solidFill>
+                <a:latin typeface="Arial"/>
+              </a:rPr>
+              <a:t>友人たちがあなたを軽蔑しますか？</a:t>
+            </a:r>
+          </a:p>
+        </p:txBody>
+      </p:sp>
+      <p:sp>
+        <p:nvSpPr>
+          <p:cNvPr id="5" name="TextBox 4"/>
+          <p:cNvSpPr txBox="1"/>
+          <p:nvPr/>
+        </p:nvSpPr>
+        <p:spPr>
+          <a:xfrm>
+            <a:off x="640080" y="4494276"/>
+            <a:ext cx="10911535" cy="310896"/>
+          </a:xfrm>
+          <a:prstGeom prst="rect">
+            <a:avLst/>
+          </a:prstGeom>
+          <a:noFill/>
+        </p:spPr>
+        <p:txBody>
+          <a:bodyPr wrap="square">
+            <a:spAutoFit/>
+          </a:bodyPr>
+          <a:lstStyle/>
+          <a:p>
+            <a:pPr algn="ctr"/>
+            <a:r>
+              <a:rPr sz="2000" b="0" i="0">
+                <a:solidFill>
+                  <a:srgbClr val="828282"/>
+                </a:solidFill>
+                <a:latin typeface="Arial"/>
+              </a:rPr>
+              <a:t>祈りでそれを神に告げなさい</a:t>
             </a:r>
           </a:p>
         </p:txBody>
